--- a/output_pptx/Jesus_Thank_You.pptx
+++ b/output_pptx/Jesus_Thank_You.pptx
@@ -20,6 +20,9 @@
     <p:sldId id="268" r:id="rId19"/>
     <p:sldId id="269" r:id="rId20"/>
     <p:sldId id="270" r:id="rId21"/>
+    <p:sldId id="271" r:id="rId22"/>
+    <p:sldId id="272" r:id="rId23"/>
+    <p:sldId id="273" r:id="rId24"/>
   </p:sldIdLst>
   <p:sldSz cx="12191695" cy="6858000" type="screen4x3"/>
   <p:notesSz cx="6858000" cy="9144000"/>
@@ -3118,23 +3121,23 @@
         </p:nvSpPr>
         <p:spPr>
           <a:xfrm>
-            <a:off x="594360" y="2258568"/>
-            <a:ext cx="11002975" cy="685800"/>
-          </a:xfrm>
-          <a:prstGeom prst="rect">
-            <a:avLst/>
-          </a:prstGeom>
-          <a:noFill/>
-        </p:spPr>
-        <p:txBody>
-          <a:bodyPr wrap="square">
-            <a:spAutoFit/>
-          </a:bodyPr>
-          <a:lstStyle/>
-          <a:p>
-            <a:pPr algn="ctr"/>
-            <a:r>
-              <a:rPr sz="3520" b="1" i="0">
+            <a:off x="640080" y="2052828"/>
+            <a:ext cx="10911535" cy="731520"/>
+          </a:xfrm>
+          <a:prstGeom prst="rect">
+            <a:avLst/>
+          </a:prstGeom>
+          <a:noFill/>
+        </p:spPr>
+        <p:txBody>
+          <a:bodyPr wrap="square">
+            <a:spAutoFit/>
+          </a:bodyPr>
+          <a:lstStyle/>
+          <a:p>
+            <a:pPr algn="ctr"/>
+            <a:r>
+              <a:rPr sz="3800" b="1" i="0">
                 <a:solidFill>
                   <a:srgbClr val="FFFFFF"/>
                 </a:solidFill>
@@ -3153,29 +3156,29 @@
         </p:nvSpPr>
         <p:spPr>
           <a:xfrm>
-            <a:off x="594360" y="2980944"/>
-            <a:ext cx="11002975" cy="347472"/>
-          </a:xfrm>
-          <a:prstGeom prst="rect">
-            <a:avLst/>
-          </a:prstGeom>
-          <a:noFill/>
-        </p:spPr>
-        <p:txBody>
-          <a:bodyPr wrap="square">
-            <a:spAutoFit/>
-          </a:bodyPr>
-          <a:lstStyle/>
-          <a:p>
-            <a:pPr algn="ctr"/>
-            <a:r>
-              <a:rPr sz="2200" b="0" i="1">
-                <a:solidFill>
-                  <a:srgbClr val="8C8C8C"/>
-                </a:solidFill>
-                <a:latin typeface="Arial"/>
-              </a:rPr>
-              <a:t/>
+            <a:off x="640080" y="2985516"/>
+            <a:ext cx="10911535" cy="731520"/>
+          </a:xfrm>
+          <a:prstGeom prst="rect">
+            <a:avLst/>
+          </a:prstGeom>
+          <a:noFill/>
+        </p:spPr>
+        <p:txBody>
+          <a:bodyPr wrap="square">
+            <a:spAutoFit/>
+          </a:bodyPr>
+          <a:lstStyle/>
+          <a:p>
+            <a:pPr algn="ctr"/>
+            <a:r>
+              <a:rPr sz="4800" b="1" i="0">
+                <a:solidFill>
+                  <a:srgbClr val="FFFFFF"/>
+                </a:solidFill>
+                <a:latin typeface="Arial"/>
+              </a:rPr>
+              <a:t>No Calvário agonizou</a:t>
             </a:r>
           </a:p>
         </p:txBody>
@@ -3188,29 +3191,29 @@
         </p:nvSpPr>
         <p:spPr>
           <a:xfrm>
-            <a:off x="594360" y="3529584"/>
-            <a:ext cx="11002975" cy="685800"/>
-          </a:xfrm>
-          <a:prstGeom prst="rect">
-            <a:avLst/>
-          </a:prstGeom>
-          <a:noFill/>
-        </p:spPr>
-        <p:txBody>
-          <a:bodyPr wrap="square">
-            <a:spAutoFit/>
-          </a:bodyPr>
-          <a:lstStyle/>
-          <a:p>
-            <a:pPr algn="ctr"/>
-            <a:r>
-              <a:rPr sz="4400" b="1" i="0">
-                <a:solidFill>
-                  <a:srgbClr val="FFFFFF"/>
-                </a:solidFill>
-                <a:latin typeface="Arial"/>
-              </a:rPr>
-              <a:t>No Calvário agonizou</a:t>
+            <a:off x="640080" y="4128516"/>
+            <a:ext cx="10911535" cy="310896"/>
+          </a:xfrm>
+          <a:prstGeom prst="rect">
+            <a:avLst/>
+          </a:prstGeom>
+          <a:noFill/>
+        </p:spPr>
+        <p:txBody>
+          <a:bodyPr wrap="square">
+            <a:spAutoFit/>
+          </a:bodyPr>
+          <a:lstStyle/>
+          <a:p>
+            <a:pPr algn="ctr"/>
+            <a:r>
+              <a:rPr sz="2000" b="0" i="0">
+                <a:solidFill>
+                  <a:srgbClr val="828282"/>
+                </a:solidFill>
+                <a:latin typeface="Arial"/>
+              </a:rPr>
+              <a:t>カルバリの苦悶 十字架</a:t>
             </a:r>
           </a:p>
         </p:txBody>
@@ -3223,29 +3226,29 @@
         </p:nvSpPr>
         <p:spPr>
           <a:xfrm>
-            <a:off x="594360" y="4251960"/>
-            <a:ext cx="11002975" cy="347472"/>
-          </a:xfrm>
-          <a:prstGeom prst="rect">
-            <a:avLst/>
-          </a:prstGeom>
-          <a:noFill/>
-        </p:spPr>
-        <p:txBody>
-          <a:bodyPr wrap="square">
-            <a:spAutoFit/>
-          </a:bodyPr>
-          <a:lstStyle/>
-          <a:p>
-            <a:pPr algn="ctr"/>
-            <a:r>
-              <a:rPr sz="2200" b="0" i="1">
-                <a:solidFill>
-                  <a:srgbClr val="8C8C8C"/>
-                </a:solidFill>
-                <a:latin typeface="Arial"/>
-              </a:rPr>
-              <a:t/>
+            <a:off x="640080" y="4494276"/>
+            <a:ext cx="10911535" cy="310896"/>
+          </a:xfrm>
+          <a:prstGeom prst="rect">
+            <a:avLst/>
+          </a:prstGeom>
+          <a:noFill/>
+        </p:spPr>
+        <p:txBody>
+          <a:bodyPr wrap="square">
+            <a:spAutoFit/>
+          </a:bodyPr>
+          <a:lstStyle/>
+          <a:p>
+            <a:pPr algn="ctr"/>
+            <a:r>
+              <a:rPr sz="2000" b="0" i="0">
+                <a:solidFill>
+                  <a:srgbClr val="828282"/>
+                </a:solidFill>
+                <a:latin typeface="Arial"/>
+              </a:rPr>
+              <a:t>理解超える奥義</a:t>
             </a:r>
           </a:p>
         </p:txBody>
@@ -3284,23 +3287,23 @@
         </p:nvSpPr>
         <p:spPr>
           <a:xfrm>
-            <a:off x="594360" y="2683764"/>
-            <a:ext cx="11002975" cy="685800"/>
-          </a:xfrm>
-          <a:prstGeom prst="rect">
-            <a:avLst/>
-          </a:prstGeom>
-          <a:noFill/>
-        </p:spPr>
-        <p:txBody>
-          <a:bodyPr wrap="square">
-            <a:spAutoFit/>
-          </a:bodyPr>
-          <a:lstStyle/>
-          <a:p>
-            <a:pPr algn="ctr"/>
-            <a:r>
-              <a:rPr sz="4400" b="1" i="0">
+            <a:off x="640080" y="2500884"/>
+            <a:ext cx="10911535" cy="731520"/>
+          </a:xfrm>
+          <a:prstGeom prst="rect">
+            <a:avLst/>
+          </a:prstGeom>
+          <a:noFill/>
+        </p:spPr>
+        <p:txBody>
+          <a:bodyPr wrap="square">
+            <a:spAutoFit/>
+          </a:bodyPr>
+          <a:lstStyle/>
+          <a:p>
+            <a:pPr algn="ctr"/>
+            <a:r>
+              <a:rPr sz="4800" b="1" i="0">
                 <a:solidFill>
                   <a:srgbClr val="FFFFFF"/>
                 </a:solidFill>
@@ -3319,8 +3322,8 @@
         </p:nvSpPr>
         <p:spPr>
           <a:xfrm>
-            <a:off x="594360" y="3406140"/>
-            <a:ext cx="11002975" cy="384048"/>
+            <a:off x="640080" y="3268980"/>
+            <a:ext cx="10911535" cy="365760"/>
           </a:xfrm>
           <a:prstGeom prst="rect">
             <a:avLst/>
@@ -3337,7 +3340,7 @@
             <a:r>
               <a:rPr sz="2400" b="0" i="1">
                 <a:solidFill>
-                  <a:srgbClr val="B4B4B4"/>
+                  <a:srgbClr val="AAAAAA"/>
                 </a:solidFill>
                 <a:latin typeface="Arial"/>
               </a:rPr>
@@ -3354,8 +3357,8 @@
         </p:nvSpPr>
         <p:spPr>
           <a:xfrm>
-            <a:off x="594360" y="3826764"/>
-            <a:ext cx="11002975" cy="347472"/>
+            <a:off x="640080" y="4046220"/>
+            <a:ext cx="10911535" cy="310896"/>
           </a:xfrm>
           <a:prstGeom prst="rect">
             <a:avLst/>
@@ -3372,11 +3375,11 @@
             <a:r>
               <a:rPr sz="2000" b="0" i="1">
                 <a:solidFill>
-                  <a:srgbClr val="8C8C8C"/>
-                </a:solidFill>
-                <a:latin typeface="Arial"/>
-              </a:rPr>
-              <a:t/>
+                  <a:srgbClr val="828282"/>
+                </a:solidFill>
+                <a:latin typeface="Arial"/>
+              </a:rPr>
+              <a:t>Inimigo fui — agora estou à mesa</a:t>
             </a:r>
           </a:p>
         </p:txBody>
@@ -3415,23 +3418,23 @@
         </p:nvSpPr>
         <p:spPr>
           <a:xfrm>
-            <a:off x="594360" y="2258568"/>
-            <a:ext cx="11002975" cy="685800"/>
-          </a:xfrm>
-          <a:prstGeom prst="rect">
-            <a:avLst/>
-          </a:prstGeom>
-          <a:noFill/>
-        </p:spPr>
-        <p:txBody>
-          <a:bodyPr wrap="square">
-            <a:spAutoFit/>
-          </a:bodyPr>
-          <a:lstStyle/>
-          <a:p>
-            <a:pPr algn="ctr"/>
-            <a:r>
-              <a:rPr sz="4022" b="1" i="0">
+            <a:off x="640080" y="2052828"/>
+            <a:ext cx="10911535" cy="731520"/>
+          </a:xfrm>
+          <a:prstGeom prst="rect">
+            <a:avLst/>
+          </a:prstGeom>
+          <a:noFill/>
+        </p:spPr>
+        <p:txBody>
+          <a:bodyPr wrap="square">
+            <a:spAutoFit/>
+          </a:bodyPr>
+          <a:lstStyle/>
+          <a:p>
+            <a:pPr algn="ctr"/>
+            <a:r>
+              <a:rPr sz="4300" b="1" i="0">
                 <a:solidFill>
                   <a:srgbClr val="FFFFFF"/>
                 </a:solidFill>
@@ -3450,29 +3453,29 @@
         </p:nvSpPr>
         <p:spPr>
           <a:xfrm>
-            <a:off x="594360" y="2980944"/>
-            <a:ext cx="11002975" cy="347472"/>
-          </a:xfrm>
-          <a:prstGeom prst="rect">
-            <a:avLst/>
-          </a:prstGeom>
-          <a:noFill/>
-        </p:spPr>
-        <p:txBody>
-          <a:bodyPr wrap="square">
-            <a:spAutoFit/>
-          </a:bodyPr>
-          <a:lstStyle/>
-          <a:p>
-            <a:pPr algn="ctr"/>
-            <a:r>
-              <a:rPr sz="2200" b="0" i="1">
-                <a:solidFill>
-                  <a:srgbClr val="8C8C8C"/>
-                </a:solidFill>
-                <a:latin typeface="Arial"/>
-              </a:rPr>
-              <a:t/>
+            <a:off x="640080" y="2985516"/>
+            <a:ext cx="10911535" cy="731520"/>
+          </a:xfrm>
+          <a:prstGeom prst="rect">
+            <a:avLst/>
+          </a:prstGeom>
+          <a:noFill/>
+        </p:spPr>
+        <p:txBody>
+          <a:bodyPr wrap="square">
+            <a:spAutoFit/>
+          </a:bodyPr>
+          <a:lstStyle/>
+          <a:p>
+            <a:pPr algn="ctr"/>
+            <a:r>
+              <a:rPr sz="4800" b="1" i="0">
+                <a:solidFill>
+                  <a:srgbClr val="FFFFFF"/>
+                </a:solidFill>
+                <a:latin typeface="Arial"/>
+              </a:rPr>
+              <a:t>Agora teu amigo sou</a:t>
             </a:r>
           </a:p>
         </p:txBody>
@@ -3485,29 +3488,29 @@
         </p:nvSpPr>
         <p:spPr>
           <a:xfrm>
-            <a:off x="594360" y="3529584"/>
-            <a:ext cx="11002975" cy="685800"/>
-          </a:xfrm>
-          <a:prstGeom prst="rect">
-            <a:avLst/>
-          </a:prstGeom>
-          <a:noFill/>
-        </p:spPr>
-        <p:txBody>
-          <a:bodyPr wrap="square">
-            <a:spAutoFit/>
-          </a:bodyPr>
-          <a:lstStyle/>
-          <a:p>
-            <a:pPr algn="ctr"/>
-            <a:r>
-              <a:rPr sz="4400" b="1" i="0">
-                <a:solidFill>
-                  <a:srgbClr val="FFFFFF"/>
-                </a:solidFill>
-                <a:latin typeface="Arial"/>
-              </a:rPr>
-              <a:t>Agora teu amigo sou</a:t>
+            <a:off x="640080" y="4128516"/>
+            <a:ext cx="10911535" cy="310896"/>
+          </a:xfrm>
+          <a:prstGeom prst="rect">
+            <a:avLst/>
+          </a:prstGeom>
+          <a:noFill/>
+        </p:spPr>
+        <p:txBody>
+          <a:bodyPr wrap="square">
+            <a:spAutoFit/>
+          </a:bodyPr>
+          <a:lstStyle/>
+          <a:p>
+            <a:pPr algn="ctr"/>
+            <a:r>
+              <a:rPr sz="2000" b="0" i="0">
+                <a:solidFill>
+                  <a:srgbClr val="828282"/>
+                </a:solidFill>
+                <a:latin typeface="Arial"/>
+              </a:rPr>
+              <a:t>完全な供え物となり</a:t>
             </a:r>
           </a:p>
         </p:txBody>
@@ -3520,29 +3523,29 @@
         </p:nvSpPr>
         <p:spPr>
           <a:xfrm>
-            <a:off x="594360" y="4251960"/>
-            <a:ext cx="11002975" cy="347472"/>
-          </a:xfrm>
-          <a:prstGeom prst="rect">
-            <a:avLst/>
-          </a:prstGeom>
-          <a:noFill/>
-        </p:spPr>
-        <p:txBody>
-          <a:bodyPr wrap="square">
-            <a:spAutoFit/>
-          </a:bodyPr>
-          <a:lstStyle/>
-          <a:p>
-            <a:pPr algn="ctr"/>
-            <a:r>
-              <a:rPr sz="2200" b="0" i="1">
-                <a:solidFill>
-                  <a:srgbClr val="8C8C8C"/>
-                </a:solidFill>
-                <a:latin typeface="Arial"/>
-              </a:rPr>
-              <a:t/>
+            <a:off x="640080" y="4494276"/>
+            <a:ext cx="10911535" cy="310896"/>
+          </a:xfrm>
+          <a:prstGeom prst="rect">
+            <a:avLst/>
+          </a:prstGeom>
+          <a:noFill/>
+        </p:spPr>
+        <p:txBody>
+          <a:bodyPr wrap="square">
+            <a:spAutoFit/>
+          </a:bodyPr>
+          <a:lstStyle/>
+          <a:p>
+            <a:pPr algn="ctr"/>
+            <a:r>
+              <a:rPr sz="2000" b="0" i="0">
+                <a:solidFill>
+                  <a:srgbClr val="828282"/>
+                </a:solidFill>
+                <a:latin typeface="Arial"/>
+              </a:rPr>
+              <a:t>敵を友と呼んだ</a:t>
             </a:r>
           </a:p>
         </p:txBody>
@@ -3581,23 +3584,23 @@
         </p:nvSpPr>
         <p:spPr>
           <a:xfrm>
-            <a:off x="594360" y="2258568"/>
-            <a:ext cx="11002975" cy="685800"/>
-          </a:xfrm>
-          <a:prstGeom prst="rect">
-            <a:avLst/>
-          </a:prstGeom>
-          <a:noFill/>
-        </p:spPr>
-        <p:txBody>
-          <a:bodyPr wrap="square">
-            <a:spAutoFit/>
-          </a:bodyPr>
-          <a:lstStyle/>
-          <a:p>
-            <a:pPr algn="ctr"/>
-            <a:r>
-              <a:rPr sz="4022" b="1" i="0">
+            <a:off x="640080" y="2052828"/>
+            <a:ext cx="10911535" cy="731520"/>
+          </a:xfrm>
+          <a:prstGeom prst="rect">
+            <a:avLst/>
+          </a:prstGeom>
+          <a:noFill/>
+        </p:spPr>
+        <p:txBody>
+          <a:bodyPr wrap="square">
+            <a:spAutoFit/>
+          </a:bodyPr>
+          <a:lstStyle/>
+          <a:p>
+            <a:pPr algn="ctr"/>
+            <a:r>
+              <a:rPr sz="4300" b="1" i="0">
                 <a:solidFill>
                   <a:srgbClr val="FFFFFF"/>
                 </a:solidFill>
@@ -3616,29 +3619,29 @@
         </p:nvSpPr>
         <p:spPr>
           <a:xfrm>
-            <a:off x="594360" y="2980944"/>
-            <a:ext cx="11002975" cy="347472"/>
-          </a:xfrm>
-          <a:prstGeom prst="rect">
-            <a:avLst/>
-          </a:prstGeom>
-          <a:noFill/>
-        </p:spPr>
-        <p:txBody>
-          <a:bodyPr wrap="square">
-            <a:spAutoFit/>
-          </a:bodyPr>
-          <a:lstStyle/>
-          <a:p>
-            <a:pPr algn="ctr"/>
-            <a:r>
-              <a:rPr sz="2200" b="0" i="1">
-                <a:solidFill>
-                  <a:srgbClr val="8C8C8C"/>
-                </a:solidFill>
-                <a:latin typeface="Arial"/>
-              </a:rPr>
-              <a:t/>
+            <a:off x="640080" y="2985516"/>
+            <a:ext cx="10911535" cy="731520"/>
+          </a:xfrm>
+          <a:prstGeom prst="rect">
+            <a:avLst/>
+          </a:prstGeom>
+          <a:noFill/>
+        </p:spPr>
+        <p:txBody>
+          <a:bodyPr wrap="square">
+            <a:spAutoFit/>
+          </a:bodyPr>
+          <a:lstStyle/>
+          <a:p>
+            <a:pPr algn="ctr"/>
+            <a:r>
+              <a:rPr sz="3800" b="1" i="0">
+                <a:solidFill>
+                  <a:srgbClr val="FFFFFF"/>
+                </a:solidFill>
+                <a:latin typeface="Arial"/>
+              </a:rPr>
+              <a:t>Mercê e bondade, ó Deus, que não têm fim</a:t>
             </a:r>
           </a:p>
         </p:txBody>
@@ -3651,29 +3654,29 @@
         </p:nvSpPr>
         <p:spPr>
           <a:xfrm>
-            <a:off x="594360" y="3529584"/>
-            <a:ext cx="11002975" cy="685800"/>
-          </a:xfrm>
-          <a:prstGeom prst="rect">
-            <a:avLst/>
-          </a:prstGeom>
-          <a:noFill/>
-        </p:spPr>
-        <p:txBody>
-          <a:bodyPr wrap="square">
-            <a:spAutoFit/>
-          </a:bodyPr>
-          <a:lstStyle/>
-          <a:p>
-            <a:pPr algn="ctr"/>
-            <a:r>
-              <a:rPr sz="3520" b="1" i="0">
-                <a:solidFill>
-                  <a:srgbClr val="FFFFFF"/>
-                </a:solidFill>
-                <a:latin typeface="Arial"/>
-              </a:rPr>
-              <a:t>Mercê e bondade, ó Deus, que não têm fim</a:t>
+            <a:off x="640080" y="4128516"/>
+            <a:ext cx="10911535" cy="310896"/>
+          </a:xfrm>
+          <a:prstGeom prst="rect">
+            <a:avLst/>
+          </a:prstGeom>
+          <a:noFill/>
+        </p:spPr>
+        <p:txBody>
+          <a:bodyPr wrap="square">
+            <a:spAutoFit/>
+          </a:bodyPr>
+          <a:lstStyle/>
+          <a:p>
+            <a:pPr algn="ctr"/>
+            <a:r>
+              <a:rPr sz="2000" b="0" i="0">
+                <a:solidFill>
+                  <a:srgbClr val="828282"/>
+                </a:solidFill>
+                <a:latin typeface="Arial"/>
+              </a:rPr>
+              <a:t>尽きることない あわれみにより</a:t>
             </a:r>
           </a:p>
         </p:txBody>
@@ -3686,29 +3689,29 @@
         </p:nvSpPr>
         <p:spPr>
           <a:xfrm>
-            <a:off x="594360" y="4251960"/>
-            <a:ext cx="11002975" cy="347472"/>
-          </a:xfrm>
-          <a:prstGeom prst="rect">
-            <a:avLst/>
-          </a:prstGeom>
-          <a:noFill/>
-        </p:spPr>
-        <p:txBody>
-          <a:bodyPr wrap="square">
-            <a:spAutoFit/>
-          </a:bodyPr>
-          <a:lstStyle/>
-          <a:p>
-            <a:pPr algn="ctr"/>
-            <a:r>
-              <a:rPr sz="2200" b="0" i="1">
-                <a:solidFill>
-                  <a:srgbClr val="8C8C8C"/>
-                </a:solidFill>
-                <a:latin typeface="Arial"/>
-              </a:rPr>
-              <a:t/>
+            <a:off x="640080" y="4494276"/>
+            <a:ext cx="10911535" cy="310896"/>
+          </a:xfrm>
+          <a:prstGeom prst="rect">
+            <a:avLst/>
+          </a:prstGeom>
+          <a:noFill/>
+        </p:spPr>
+        <p:txBody>
+          <a:bodyPr wrap="square">
+            <a:spAutoFit/>
+          </a:bodyPr>
+          <a:lstStyle/>
+          <a:p>
+            <a:pPr algn="ctr"/>
+            <a:r>
+              <a:rPr sz="2000" b="0" i="0">
+                <a:solidFill>
+                  <a:srgbClr val="828282"/>
+                </a:solidFill>
+                <a:latin typeface="Arial"/>
+              </a:rPr>
+              <a:t>主の恵み そそがれた</a:t>
             </a:r>
           </a:p>
         </p:txBody>
@@ -3747,23 +3750,23 @@
         </p:nvSpPr>
         <p:spPr>
           <a:xfrm>
-            <a:off x="594360" y="1837944"/>
-            <a:ext cx="11002975" cy="685800"/>
-          </a:xfrm>
-          <a:prstGeom prst="rect">
-            <a:avLst/>
-          </a:prstGeom>
-          <a:noFill/>
-        </p:spPr>
-        <p:txBody>
-          <a:bodyPr wrap="square">
-            <a:spAutoFit/>
-          </a:bodyPr>
-          <a:lstStyle/>
-          <a:p>
-            <a:pPr algn="ctr"/>
-            <a:r>
-              <a:rPr sz="4400" b="1" i="0">
+            <a:off x="640080" y="1650492"/>
+            <a:ext cx="10911535" cy="731520"/>
+          </a:xfrm>
+          <a:prstGeom prst="rect">
+            <a:avLst/>
+          </a:prstGeom>
+          <a:noFill/>
+        </p:spPr>
+        <p:txBody>
+          <a:bodyPr wrap="square">
+            <a:spAutoFit/>
+          </a:bodyPr>
+          <a:lstStyle/>
+          <a:p>
+            <a:pPr algn="ctr"/>
+            <a:r>
+              <a:rPr sz="4800" b="1" i="0">
                 <a:solidFill>
                   <a:srgbClr val="FFFFFF"/>
                 </a:solidFill>
@@ -3782,8 +3785,8 @@
         </p:nvSpPr>
         <p:spPr>
           <a:xfrm>
-            <a:off x="594360" y="2560320"/>
-            <a:ext cx="11002975" cy="384048"/>
+            <a:off x="640080" y="2418588"/>
+            <a:ext cx="10911535" cy="365760"/>
           </a:xfrm>
           <a:prstGeom prst="rect">
             <a:avLst/>
@@ -3800,7 +3803,7 @@
             <a:r>
               <a:rPr sz="2400" b="0" i="1">
                 <a:solidFill>
-                  <a:srgbClr val="B4B4B4"/>
+                  <a:srgbClr val="AAAAAA"/>
                 </a:solidFill>
                 <a:latin typeface="Arial"/>
               </a:rPr>
@@ -3817,8 +3820,78 @@
         </p:nvSpPr>
         <p:spPr>
           <a:xfrm>
-            <a:off x="594360" y="2980944"/>
-            <a:ext cx="11002975" cy="347472"/>
+            <a:off x="640080" y="2985516"/>
+            <a:ext cx="10911535" cy="731520"/>
+          </a:xfrm>
+          <a:prstGeom prst="rect">
+            <a:avLst/>
+          </a:prstGeom>
+          <a:noFill/>
+        </p:spPr>
+        <p:txBody>
+          <a:bodyPr wrap="square">
+            <a:spAutoFit/>
+          </a:bodyPr>
+          <a:lstStyle/>
+          <a:p>
+            <a:pPr algn="ctr"/>
+            <a:r>
+              <a:rPr sz="4800" b="1" i="0">
+                <a:solidFill>
+                  <a:srgbClr val="FFFFFF"/>
+                </a:solidFill>
+                <a:latin typeface="Arial"/>
+              </a:rPr>
+              <a:t>敵を友と呼んだ</a:t>
+            </a:r>
+          </a:p>
+        </p:txBody>
+      </p:sp>
+      <p:sp>
+        <p:nvSpPr>
+          <p:cNvPr id="5" name="TextBox 4"/>
+          <p:cNvSpPr txBox="1"/>
+          <p:nvPr/>
+        </p:nvSpPr>
+        <p:spPr>
+          <a:xfrm>
+            <a:off x="640080" y="3753612"/>
+            <a:ext cx="10911535" cy="365760"/>
+          </a:xfrm>
+          <a:prstGeom prst="rect">
+            <a:avLst/>
+          </a:prstGeom>
+          <a:noFill/>
+        </p:spPr>
+        <p:txBody>
+          <a:bodyPr wrap="square">
+            <a:spAutoFit/>
+          </a:bodyPr>
+          <a:lstStyle/>
+          <a:p>
+            <a:pPr algn="ctr"/>
+            <a:r>
+              <a:rPr sz="2400" b="0" i="1">
+                <a:solidFill>
+                  <a:srgbClr val="AAAAAA"/>
+                </a:solidFill>
+                <a:latin typeface="Arial"/>
+              </a:rPr>
+              <a:t>teki wo tomo to yonda</a:t>
+            </a:r>
+          </a:p>
+        </p:txBody>
+      </p:sp>
+      <p:sp>
+        <p:nvSpPr>
+          <p:cNvPr id="6" name="TextBox 5"/>
+          <p:cNvSpPr txBox="1"/>
+          <p:nvPr/>
+        </p:nvSpPr>
+        <p:spPr>
+          <a:xfrm>
+            <a:off x="640080" y="4530852"/>
+            <a:ext cx="10911535" cy="310896"/>
           </a:xfrm>
           <a:prstGeom prst="rect">
             <a:avLst/>
@@ -3835,81 +3908,11 @@
             <a:r>
               <a:rPr sz="2000" b="0" i="1">
                 <a:solidFill>
-                  <a:srgbClr val="8C8C8C"/>
-                </a:solidFill>
-                <a:latin typeface="Arial"/>
-              </a:rPr>
-              <a:t/>
-            </a:r>
-          </a:p>
-        </p:txBody>
-      </p:sp>
-      <p:sp>
-        <p:nvSpPr>
-          <p:cNvPr id="5" name="TextBox 4"/>
-          <p:cNvSpPr txBox="1"/>
-          <p:nvPr/>
-        </p:nvSpPr>
-        <p:spPr>
-          <a:xfrm>
-            <a:off x="594360" y="3529584"/>
-            <a:ext cx="11002975" cy="685800"/>
-          </a:xfrm>
-          <a:prstGeom prst="rect">
-            <a:avLst/>
-          </a:prstGeom>
-          <a:noFill/>
-        </p:spPr>
-        <p:txBody>
-          <a:bodyPr wrap="square">
-            <a:spAutoFit/>
-          </a:bodyPr>
-          <a:lstStyle/>
-          <a:p>
-            <a:pPr algn="ctr"/>
-            <a:r>
-              <a:rPr sz="4400" b="1" i="0">
-                <a:solidFill>
-                  <a:srgbClr val="FFFFFF"/>
-                </a:solidFill>
-                <a:latin typeface="Arial"/>
-              </a:rPr>
-              <a:t>敵を友と呼んだ</a:t>
-            </a:r>
-          </a:p>
-        </p:txBody>
-      </p:sp>
-      <p:sp>
-        <p:nvSpPr>
-          <p:cNvPr id="6" name="TextBox 5"/>
-          <p:cNvSpPr txBox="1"/>
-          <p:nvPr/>
-        </p:nvSpPr>
-        <p:spPr>
-          <a:xfrm>
-            <a:off x="594360" y="4251960"/>
-            <a:ext cx="11002975" cy="384048"/>
-          </a:xfrm>
-          <a:prstGeom prst="rect">
-            <a:avLst/>
-          </a:prstGeom>
-          <a:noFill/>
-        </p:spPr>
-        <p:txBody>
-          <a:bodyPr wrap="square">
-            <a:spAutoFit/>
-          </a:bodyPr>
-          <a:lstStyle/>
-          <a:p>
-            <a:pPr algn="ctr"/>
-            <a:r>
-              <a:rPr sz="2400" b="0" i="1">
-                <a:solidFill>
-                  <a:srgbClr val="B4B4B4"/>
-                </a:solidFill>
-                <a:latin typeface="Arial"/>
-              </a:rPr>
-              <a:t>teki wo tomo to yonda</a:t>
+                  <a:srgbClr val="828282"/>
+                </a:solidFill>
+                <a:latin typeface="Arial"/>
+              </a:rPr>
+              <a:t>Foi teu sacrifício que me aproximou</a:t>
             </a:r>
           </a:p>
         </p:txBody>
@@ -3922,8 +3925,8 @@
         </p:nvSpPr>
         <p:spPr>
           <a:xfrm>
-            <a:off x="594360" y="4672584"/>
-            <a:ext cx="11002975" cy="347472"/>
+            <a:off x="640080" y="4896612"/>
+            <a:ext cx="10911535" cy="310896"/>
           </a:xfrm>
           <a:prstGeom prst="rect">
             <a:avLst/>
@@ -3940,11 +3943,11 @@
             <a:r>
               <a:rPr sz="2000" b="0" i="1">
                 <a:solidFill>
-                  <a:srgbClr val="8C8C8C"/>
-                </a:solidFill>
-                <a:latin typeface="Arial"/>
-              </a:rPr>
-              <a:t/>
+                  <a:srgbClr val="828282"/>
+                </a:solidFill>
+                <a:latin typeface="Arial"/>
+              </a:rPr>
+              <a:t>Agora teu amigo sou</a:t>
             </a:r>
           </a:p>
         </p:txBody>
@@ -3983,23 +3986,23 @@
         </p:nvSpPr>
         <p:spPr>
           <a:xfrm>
-            <a:off x="594360" y="1837944"/>
-            <a:ext cx="11002975" cy="685800"/>
-          </a:xfrm>
-          <a:prstGeom prst="rect">
-            <a:avLst/>
-          </a:prstGeom>
-          <a:noFill/>
-        </p:spPr>
-        <p:txBody>
-          <a:bodyPr wrap="square">
-            <a:spAutoFit/>
-          </a:bodyPr>
-          <a:lstStyle/>
-          <a:p>
-            <a:pPr algn="ctr"/>
-            <a:r>
-              <a:rPr sz="4400" b="1" i="0">
+            <a:off x="640080" y="1650492"/>
+            <a:ext cx="10911535" cy="731520"/>
+          </a:xfrm>
+          <a:prstGeom prst="rect">
+            <a:avLst/>
+          </a:prstGeom>
+          <a:noFill/>
+        </p:spPr>
+        <p:txBody>
+          <a:bodyPr wrap="square">
+            <a:spAutoFit/>
+          </a:bodyPr>
+          <a:lstStyle/>
+          <a:p>
+            <a:pPr algn="ctr"/>
+            <a:r>
+              <a:rPr sz="4800" b="1" i="0">
                 <a:solidFill>
                   <a:srgbClr val="FFFFFF"/>
                 </a:solidFill>
@@ -4018,8 +4021,8 @@
         </p:nvSpPr>
         <p:spPr>
           <a:xfrm>
-            <a:off x="594360" y="2560320"/>
-            <a:ext cx="11002975" cy="384048"/>
+            <a:off x="640080" y="2418588"/>
+            <a:ext cx="10911535" cy="365760"/>
           </a:xfrm>
           <a:prstGeom prst="rect">
             <a:avLst/>
@@ -4036,7 +4039,7 @@
             <a:r>
               <a:rPr sz="2400" b="0" i="1">
                 <a:solidFill>
-                  <a:srgbClr val="B4B4B4"/>
+                  <a:srgbClr val="AAAAAA"/>
                 </a:solidFill>
                 <a:latin typeface="Arial"/>
               </a:rPr>
@@ -4053,8 +4056,78 @@
         </p:nvSpPr>
         <p:spPr>
           <a:xfrm>
-            <a:off x="594360" y="2980944"/>
-            <a:ext cx="11002975" cy="347472"/>
+            <a:off x="640080" y="2985516"/>
+            <a:ext cx="10911535" cy="731520"/>
+          </a:xfrm>
+          <a:prstGeom prst="rect">
+            <a:avLst/>
+          </a:prstGeom>
+          <a:noFill/>
+        </p:spPr>
+        <p:txBody>
+          <a:bodyPr wrap="square">
+            <a:spAutoFit/>
+          </a:bodyPr>
+          <a:lstStyle/>
+          <a:p>
+            <a:pPr algn="ctr"/>
+            <a:r>
+              <a:rPr sz="4800" b="1" i="0">
+                <a:solidFill>
+                  <a:srgbClr val="FFFFFF"/>
+                </a:solidFill>
+                <a:latin typeface="Arial"/>
+              </a:rPr>
+              <a:t>主の恵み そそがれた</a:t>
+            </a:r>
+          </a:p>
+        </p:txBody>
+      </p:sp>
+      <p:sp>
+        <p:nvSpPr>
+          <p:cNvPr id="5" name="TextBox 4"/>
+          <p:cNvSpPr txBox="1"/>
+          <p:nvPr/>
+        </p:nvSpPr>
+        <p:spPr>
+          <a:xfrm>
+            <a:off x="640080" y="3753612"/>
+            <a:ext cx="10911535" cy="365760"/>
+          </a:xfrm>
+          <a:prstGeom prst="rect">
+            <a:avLst/>
+          </a:prstGeom>
+          <a:noFill/>
+        </p:spPr>
+        <p:txBody>
+          <a:bodyPr wrap="square">
+            <a:spAutoFit/>
+          </a:bodyPr>
+          <a:lstStyle/>
+          <a:p>
+            <a:pPr algn="ctr"/>
+            <a:r>
+              <a:rPr sz="2400" b="0" i="1">
+                <a:solidFill>
+                  <a:srgbClr val="AAAAAA"/>
+                </a:solidFill>
+                <a:latin typeface="Arial"/>
+              </a:rPr>
+              <a:t>shu no megumi sosogareta</a:t>
+            </a:r>
+          </a:p>
+        </p:txBody>
+      </p:sp>
+      <p:sp>
+        <p:nvSpPr>
+          <p:cNvPr id="6" name="TextBox 5"/>
+          <p:cNvSpPr txBox="1"/>
+          <p:nvPr/>
+        </p:nvSpPr>
+        <p:spPr>
+          <a:xfrm>
+            <a:off x="640080" y="4530852"/>
+            <a:ext cx="10911535" cy="310896"/>
           </a:xfrm>
           <a:prstGeom prst="rect">
             <a:avLst/>
@@ -4071,81 +4144,11 @@
             <a:r>
               <a:rPr sz="2000" b="0" i="1">
                 <a:solidFill>
-                  <a:srgbClr val="8C8C8C"/>
-                </a:solidFill>
-                <a:latin typeface="Arial"/>
-              </a:rPr>
-              <a:t/>
-            </a:r>
-          </a:p>
-        </p:txBody>
-      </p:sp>
-      <p:sp>
-        <p:nvSpPr>
-          <p:cNvPr id="5" name="TextBox 4"/>
-          <p:cNvSpPr txBox="1"/>
-          <p:nvPr/>
-        </p:nvSpPr>
-        <p:spPr>
-          <a:xfrm>
-            <a:off x="594360" y="3529584"/>
-            <a:ext cx="11002975" cy="685800"/>
-          </a:xfrm>
-          <a:prstGeom prst="rect">
-            <a:avLst/>
-          </a:prstGeom>
-          <a:noFill/>
-        </p:spPr>
-        <p:txBody>
-          <a:bodyPr wrap="square">
-            <a:spAutoFit/>
-          </a:bodyPr>
-          <a:lstStyle/>
-          <a:p>
-            <a:pPr algn="ctr"/>
-            <a:r>
-              <a:rPr sz="4400" b="1" i="0">
-                <a:solidFill>
-                  <a:srgbClr val="FFFFFF"/>
-                </a:solidFill>
-                <a:latin typeface="Arial"/>
-              </a:rPr>
-              <a:t>主の恵み そそがれた</a:t>
-            </a:r>
-          </a:p>
-        </p:txBody>
-      </p:sp>
-      <p:sp>
-        <p:nvSpPr>
-          <p:cNvPr id="6" name="TextBox 5"/>
-          <p:cNvSpPr txBox="1"/>
-          <p:nvPr/>
-        </p:nvSpPr>
-        <p:spPr>
-          <a:xfrm>
-            <a:off x="594360" y="4251960"/>
-            <a:ext cx="11002975" cy="384048"/>
-          </a:xfrm>
-          <a:prstGeom prst="rect">
-            <a:avLst/>
-          </a:prstGeom>
-          <a:noFill/>
-        </p:spPr>
-        <p:txBody>
-          <a:bodyPr wrap="square">
-            <a:spAutoFit/>
-          </a:bodyPr>
-          <a:lstStyle/>
-          <a:p>
-            <a:pPr algn="ctr"/>
-            <a:r>
-              <a:rPr sz="2400" b="0" i="1">
-                <a:solidFill>
-                  <a:srgbClr val="B4B4B4"/>
-                </a:solidFill>
-                <a:latin typeface="Arial"/>
-              </a:rPr>
-              <a:t>shu no megumi sosogareta</a:t>
+                  <a:srgbClr val="828282"/>
+                </a:solidFill>
+                <a:latin typeface="Arial"/>
+              </a:rPr>
+              <a:t>Tua gloriosa graça derramaste a mim</a:t>
             </a:r>
           </a:p>
         </p:txBody>
@@ -4158,8 +4161,8 @@
         </p:nvSpPr>
         <p:spPr>
           <a:xfrm>
-            <a:off x="594360" y="4672584"/>
-            <a:ext cx="11002975" cy="347472"/>
+            <a:off x="640080" y="4896612"/>
+            <a:ext cx="10911535" cy="310896"/>
           </a:xfrm>
           <a:prstGeom prst="rect">
             <a:avLst/>
@@ -4176,11 +4179,11 @@
             <a:r>
               <a:rPr sz="2000" b="0" i="1">
                 <a:solidFill>
-                  <a:srgbClr val="8C8C8C"/>
-                </a:solidFill>
-                <a:latin typeface="Arial"/>
-              </a:rPr>
-              <a:t/>
+                  <a:srgbClr val="828282"/>
+                </a:solidFill>
+                <a:latin typeface="Arial"/>
+              </a:rPr>
+              <a:t>Mercê e bondade, ó Deus, que não têm fim</a:t>
             </a:r>
           </a:p>
         </p:txBody>
@@ -4219,23 +4222,23 @@
         </p:nvSpPr>
         <p:spPr>
           <a:xfrm>
-            <a:off x="594360" y="2258568"/>
-            <a:ext cx="11002975" cy="685800"/>
-          </a:xfrm>
-          <a:prstGeom prst="rect">
-            <a:avLst/>
-          </a:prstGeom>
-          <a:noFill/>
-        </p:spPr>
-        <p:txBody>
-          <a:bodyPr wrap="square">
-            <a:spAutoFit/>
-          </a:bodyPr>
-          <a:lstStyle/>
-          <a:p>
-            <a:pPr algn="ctr"/>
-            <a:r>
-              <a:rPr sz="4400" b="1" i="0">
+            <a:off x="640080" y="2052828"/>
+            <a:ext cx="10911535" cy="731520"/>
+          </a:xfrm>
+          <a:prstGeom prst="rect">
+            <a:avLst/>
+          </a:prstGeom>
+          <a:noFill/>
+        </p:spPr>
+        <p:txBody>
+          <a:bodyPr wrap="square">
+            <a:spAutoFit/>
+          </a:bodyPr>
+          <a:lstStyle/>
+          <a:p>
+            <a:pPr algn="ctr"/>
+            <a:r>
+              <a:rPr sz="4800" b="1" i="0">
                 <a:solidFill>
                   <a:srgbClr val="FFFFFF"/>
                 </a:solidFill>
@@ -4254,29 +4257,125 @@
         </p:nvSpPr>
         <p:spPr>
           <a:xfrm>
-            <a:off x="594360" y="2980944"/>
-            <a:ext cx="11002975" cy="347472"/>
-          </a:xfrm>
-          <a:prstGeom prst="rect">
-            <a:avLst/>
-          </a:prstGeom>
-          <a:noFill/>
-        </p:spPr>
-        <p:txBody>
-          <a:bodyPr wrap="square">
-            <a:spAutoFit/>
-          </a:bodyPr>
-          <a:lstStyle/>
-          <a:p>
-            <a:pPr algn="ctr"/>
-            <a:r>
-              <a:rPr sz="2200" b="0" i="1">
-                <a:solidFill>
-                  <a:srgbClr val="8C8C8C"/>
-                </a:solidFill>
-                <a:latin typeface="Arial"/>
-              </a:rPr>
-              <a:t/>
+            <a:off x="640080" y="2985516"/>
+            <a:ext cx="10911535" cy="731520"/>
+          </a:xfrm>
+          <a:prstGeom prst="rect">
+            <a:avLst/>
+          </a:prstGeom>
+          <a:noFill/>
+        </p:spPr>
+        <p:txBody>
+          <a:bodyPr wrap="square">
+            <a:spAutoFit/>
+          </a:bodyPr>
+          <a:lstStyle/>
+          <a:p>
+            <a:pPr algn="ctr"/>
+            <a:r>
+              <a:rPr sz="4800" b="1" i="0">
+                <a:solidFill>
+                  <a:srgbClr val="FFFFFF"/>
+                </a:solidFill>
+                <a:latin typeface="Arial"/>
+              </a:rPr>
+              <a:t>Quero viver pra ti</a:t>
+            </a:r>
+          </a:p>
+        </p:txBody>
+      </p:sp>
+    </p:spTree>
+  </p:cSld>
+  <p:clrMapOvr>
+    <a:masterClrMapping/>
+  </p:clrMapOvr>
+</p:sld>
+</file>
+
+<file path=ppt/slides/slide16.xml><?xml version="1.0" encoding="utf-8"?>
+<p:sld xmlns:a="http://schemas.openxmlformats.org/drawingml/2006/main" xmlns:p="http://schemas.openxmlformats.org/presentationml/2006/main" xmlns:r="http://schemas.openxmlformats.org/officeDocument/2006/relationships">
+  <p:cSld>
+    <p:bg>
+      <p:bgPr>
+        <a:solidFill>
+          <a:srgbClr val="000000"/>
+        </a:solidFill>
+        <a:effectLst/>
+      </p:bgPr>
+    </p:bg>
+    <p:spTree>
+      <p:nvGrpSpPr>
+        <p:cNvPr id="1" name=""/>
+        <p:cNvGrpSpPr/>
+        <p:nvPr/>
+      </p:nvGrpSpPr>
+      <p:grpSpPr/>
+      <p:sp>
+        <p:nvSpPr>
+          <p:cNvPr id="2" name="TextBox 1"/>
+          <p:cNvSpPr txBox="1"/>
+          <p:nvPr/>
+        </p:nvSpPr>
+        <p:spPr>
+          <a:xfrm>
+            <a:off x="640080" y="2052828"/>
+            <a:ext cx="10911535" cy="731520"/>
+          </a:xfrm>
+          <a:prstGeom prst="rect">
+            <a:avLst/>
+          </a:prstGeom>
+          <a:noFill/>
+        </p:spPr>
+        <p:txBody>
+          <a:bodyPr wrap="square">
+            <a:spAutoFit/>
+          </a:bodyPr>
+          <a:lstStyle/>
+          <a:p>
+            <a:pPr algn="ctr"/>
+            <a:r>
+              <a:rPr sz="4800" b="1" i="0">
+                <a:solidFill>
+                  <a:srgbClr val="FFFFFF"/>
+                </a:solidFill>
+                <a:latin typeface="Arial"/>
+              </a:rPr>
+              <a:t>Jesus, teu sangue me lavou</a:t>
+            </a:r>
+          </a:p>
+        </p:txBody>
+      </p:sp>
+      <p:sp>
+        <p:nvSpPr>
+          <p:cNvPr id="3" name="TextBox 2"/>
+          <p:cNvSpPr txBox="1"/>
+          <p:nvPr/>
+        </p:nvSpPr>
+        <p:spPr>
+          <a:xfrm>
+            <a:off x="640080" y="2985516"/>
+            <a:ext cx="10911535" cy="731520"/>
+          </a:xfrm>
+          <a:prstGeom prst="rect">
+            <a:avLst/>
+          </a:prstGeom>
+          <a:noFill/>
+        </p:spPr>
+        <p:txBody>
+          <a:bodyPr wrap="square">
+            <a:spAutoFit/>
+          </a:bodyPr>
+          <a:lstStyle/>
+          <a:p>
+            <a:pPr algn="ctr"/>
+            <a:r>
+              <a:rPr sz="4800" b="1" i="0">
+                <a:solidFill>
+                  <a:srgbClr val="FFFFFF"/>
+                </a:solidFill>
+                <a:latin typeface="Arial"/>
+              </a:rPr>
+              <a:t>Obrigado</a:t>
             </a:r>
           </a:p>
         </p:txBody>
@@ -4289,29 +4388,195 @@
         </p:nvSpPr>
         <p:spPr>
           <a:xfrm>
-            <a:off x="594360" y="3529584"/>
-            <a:ext cx="11002975" cy="685800"/>
-          </a:xfrm>
-          <a:prstGeom prst="rect">
-            <a:avLst/>
-          </a:prstGeom>
-          <a:noFill/>
-        </p:spPr>
-        <p:txBody>
-          <a:bodyPr wrap="square">
-            <a:spAutoFit/>
-          </a:bodyPr>
-          <a:lstStyle/>
-          <a:p>
-            <a:pPr algn="ctr"/>
-            <a:r>
-              <a:rPr sz="4400" b="1" i="0">
+            <a:off x="640080" y="4128516"/>
+            <a:ext cx="10911535" cy="310896"/>
+          </a:xfrm>
+          <a:prstGeom prst="rect">
+            <a:avLst/>
+          </a:prstGeom>
+          <a:noFill/>
+        </p:spPr>
+        <p:txBody>
+          <a:bodyPr wrap="square">
+            <a:spAutoFit/>
+          </a:bodyPr>
+          <a:lstStyle/>
+          <a:p>
+            <a:pPr algn="ctr"/>
+            <a:r>
+              <a:rPr sz="2000" b="0" i="0">
+                <a:solidFill>
+                  <a:srgbClr val="828282"/>
+                </a:solidFill>
+                <a:latin typeface="Arial"/>
+              </a:rPr>
+              <a:t>罪 洗い流した</a:t>
+            </a:r>
+          </a:p>
+        </p:txBody>
+      </p:sp>
+      <p:sp>
+        <p:nvSpPr>
+          <p:cNvPr id="5" name="TextBox 4"/>
+          <p:cNvSpPr txBox="1"/>
+          <p:nvPr/>
+        </p:nvSpPr>
+        <p:spPr>
+          <a:xfrm>
+            <a:off x="640080" y="4494276"/>
+            <a:ext cx="10911535" cy="310896"/>
+          </a:xfrm>
+          <a:prstGeom prst="rect">
+            <a:avLst/>
+          </a:prstGeom>
+          <a:noFill/>
+        </p:spPr>
+        <p:txBody>
+          <a:bodyPr wrap="square">
+            <a:spAutoFit/>
+          </a:bodyPr>
+          <a:lstStyle/>
+          <a:p>
+            <a:pPr algn="ctr"/>
+            <a:r>
+              <a:rPr sz="2000" b="0" i="0">
+                <a:solidFill>
+                  <a:srgbClr val="828282"/>
+                </a:solidFill>
+                <a:latin typeface="Arial"/>
+              </a:rPr>
+              <a:t>イエスの血</a:t>
+            </a:r>
+          </a:p>
+        </p:txBody>
+      </p:sp>
+    </p:spTree>
+  </p:cSld>
+  <p:clrMapOvr>
+    <a:masterClrMapping/>
+  </p:clrMapOvr>
+</p:sld>
+</file>
+
+<file path=ppt/slides/slide17.xml><?xml version="1.0" encoding="utf-8"?>
+<p:sld xmlns:a="http://schemas.openxmlformats.org/drawingml/2006/main" xmlns:p="http://schemas.openxmlformats.org/presentationml/2006/main" xmlns:r="http://schemas.openxmlformats.org/officeDocument/2006/relationships">
+  <p:cSld>
+    <p:bg>
+      <p:bgPr>
+        <a:solidFill>
+          <a:srgbClr val="000000"/>
+        </a:solidFill>
+        <a:effectLst/>
+      </p:bgPr>
+    </p:bg>
+    <p:spTree>
+      <p:nvGrpSpPr>
+        <p:cNvPr id="1" name=""/>
+        <p:cNvGrpSpPr/>
+        <p:nvPr/>
+      </p:nvGrpSpPr>
+      <p:grpSpPr/>
+      <p:sp>
+        <p:nvSpPr>
+          <p:cNvPr id="2" name="TextBox 1"/>
+          <p:cNvSpPr txBox="1"/>
+          <p:nvPr/>
+        </p:nvSpPr>
+        <p:spPr>
+          <a:xfrm>
+            <a:off x="640080" y="2052828"/>
+            <a:ext cx="10911535" cy="731520"/>
+          </a:xfrm>
+          <a:prstGeom prst="rect">
+            <a:avLst/>
+          </a:prstGeom>
+          <a:noFill/>
+        </p:spPr>
+        <p:txBody>
+          <a:bodyPr wrap="square">
+            <a:spAutoFit/>
+          </a:bodyPr>
+          <a:lstStyle/>
+          <a:p>
+            <a:pPr algn="ctr"/>
+            <a:r>
+              <a:rPr sz="4800" b="1" i="0">
                 <a:solidFill>
                   <a:srgbClr val="FFFFFF"/>
                 </a:solidFill>
                 <a:latin typeface="Arial"/>
               </a:rPr>
-              <a:t>Quero viver pra ti</a:t>
+              <a:t>De Deus a ira toda aplacou</a:t>
+            </a:r>
+          </a:p>
+        </p:txBody>
+      </p:sp>
+      <p:sp>
+        <p:nvSpPr>
+          <p:cNvPr id="3" name="TextBox 2"/>
+          <p:cNvSpPr txBox="1"/>
+          <p:nvPr/>
+        </p:nvSpPr>
+        <p:spPr>
+          <a:xfrm>
+            <a:off x="640080" y="2985516"/>
+            <a:ext cx="10911535" cy="731520"/>
+          </a:xfrm>
+          <a:prstGeom prst="rect">
+            <a:avLst/>
+          </a:prstGeom>
+          <a:noFill/>
+        </p:spPr>
+        <p:txBody>
+          <a:bodyPr wrap="square">
+            <a:spAutoFit/>
+          </a:bodyPr>
+          <a:lstStyle/>
+          <a:p>
+            <a:pPr algn="ctr"/>
+            <a:r>
+              <a:rPr sz="4800" b="1" i="0">
+                <a:solidFill>
+                  <a:srgbClr val="FFFFFF"/>
+                </a:solidFill>
+                <a:latin typeface="Arial"/>
+              </a:rPr>
+              <a:t>Obrigado</a:t>
+            </a:r>
+          </a:p>
+        </p:txBody>
+      </p:sp>
+      <p:sp>
+        <p:nvSpPr>
+          <p:cNvPr id="4" name="TextBox 3"/>
+          <p:cNvSpPr txBox="1"/>
+          <p:nvPr/>
+        </p:nvSpPr>
+        <p:spPr>
+          <a:xfrm>
+            <a:off x="640080" y="4128516"/>
+            <a:ext cx="10911535" cy="310896"/>
+          </a:xfrm>
+          <a:prstGeom prst="rect">
+            <a:avLst/>
+          </a:prstGeom>
+          <a:noFill/>
+        </p:spPr>
+        <p:txBody>
+          <a:bodyPr wrap="square">
+            <a:spAutoFit/>
+          </a:bodyPr>
+          <a:lstStyle/>
+          <a:p>
+            <a:pPr algn="ctr"/>
+            <a:r>
+              <a:rPr sz="2000" b="0" i="0">
+                <a:solidFill>
+                  <a:srgbClr val="828282"/>
+                </a:solidFill>
+                <a:latin typeface="Arial"/>
+              </a:rPr>
+              <a:t>御父のいかりなだめた 十字架</a:t>
             </a:r>
           </a:p>
         </p:txBody>
@@ -4324,29 +4589,160 @@
         </p:nvSpPr>
         <p:spPr>
           <a:xfrm>
-            <a:off x="594360" y="4251960"/>
-            <a:ext cx="11002975" cy="347472"/>
-          </a:xfrm>
-          <a:prstGeom prst="rect">
-            <a:avLst/>
-          </a:prstGeom>
-          <a:noFill/>
-        </p:spPr>
-        <p:txBody>
-          <a:bodyPr wrap="square">
-            <a:spAutoFit/>
-          </a:bodyPr>
-          <a:lstStyle/>
-          <a:p>
-            <a:pPr algn="ctr"/>
-            <a:r>
-              <a:rPr sz="2200" b="0" i="1">
-                <a:solidFill>
-                  <a:srgbClr val="8C8C8C"/>
-                </a:solidFill>
-                <a:latin typeface="Arial"/>
-              </a:rPr>
-              <a:t/>
+            <a:off x="640080" y="4494276"/>
+            <a:ext cx="10911535" cy="310896"/>
+          </a:xfrm>
+          <a:prstGeom prst="rect">
+            <a:avLst/>
+          </a:prstGeom>
+          <a:noFill/>
+        </p:spPr>
+        <p:txBody>
+          <a:bodyPr wrap="square">
+            <a:spAutoFit/>
+          </a:bodyPr>
+          <a:lstStyle/>
+          <a:p>
+            <a:pPr algn="ctr"/>
+            <a:r>
+              <a:rPr sz="2000" b="0" i="0">
+                <a:solidFill>
+                  <a:srgbClr val="828282"/>
+                </a:solidFill>
+                <a:latin typeface="Arial"/>
+              </a:rPr>
+              <a:t>かつての敵は 食卓を共に</a:t>
+            </a:r>
+          </a:p>
+        </p:txBody>
+      </p:sp>
+    </p:spTree>
+  </p:cSld>
+  <p:clrMapOvr>
+    <a:masterClrMapping/>
+  </p:clrMapOvr>
+</p:sld>
+</file>
+
+<file path=ppt/slides/slide18.xml><?xml version="1.0" encoding="utf-8"?>
+<p:sld xmlns:a="http://schemas.openxmlformats.org/drawingml/2006/main" xmlns:p="http://schemas.openxmlformats.org/presentationml/2006/main" xmlns:r="http://schemas.openxmlformats.org/officeDocument/2006/relationships">
+  <p:cSld>
+    <p:bg>
+      <p:bgPr>
+        <a:solidFill>
+          <a:srgbClr val="000000"/>
+        </a:solidFill>
+        <a:effectLst/>
+      </p:bgPr>
+    </p:bg>
+    <p:spTree>
+      <p:nvGrpSpPr>
+        <p:cNvPr id="1" name=""/>
+        <p:cNvGrpSpPr/>
+        <p:nvPr/>
+      </p:nvGrpSpPr>
+      <p:grpSpPr/>
+      <p:sp>
+        <p:nvSpPr>
+          <p:cNvPr id="2" name="TextBox 1"/>
+          <p:cNvSpPr txBox="1"/>
+          <p:nvPr/>
+        </p:nvSpPr>
+        <p:spPr>
+          <a:xfrm>
+            <a:off x="640080" y="2052828"/>
+            <a:ext cx="10911535" cy="731520"/>
+          </a:xfrm>
+          <a:prstGeom prst="rect">
+            <a:avLst/>
+          </a:prstGeom>
+          <a:noFill/>
+        </p:spPr>
+        <p:txBody>
+          <a:bodyPr wrap="square">
+            <a:spAutoFit/>
+          </a:bodyPr>
+          <a:lstStyle/>
+          <a:p>
+            <a:pPr algn="ctr"/>
+            <a:r>
+              <a:rPr sz="4800" b="1" i="0">
+                <a:solidFill>
+                  <a:srgbClr val="FFFFFF"/>
+                </a:solidFill>
+                <a:latin typeface="Arial"/>
+              </a:rPr>
+              <a:t>Inimigo fui — agora estou à mesa</a:t>
+            </a:r>
+          </a:p>
+        </p:txBody>
+      </p:sp>
+      <p:sp>
+        <p:nvSpPr>
+          <p:cNvPr id="3" name="TextBox 2"/>
+          <p:cNvSpPr txBox="1"/>
+          <p:nvPr/>
+        </p:nvSpPr>
+        <p:spPr>
+          <a:xfrm>
+            <a:off x="640080" y="2985516"/>
+            <a:ext cx="10911535" cy="731520"/>
+          </a:xfrm>
+          <a:prstGeom prst="rect">
+            <a:avLst/>
+          </a:prstGeom>
+          <a:noFill/>
+        </p:spPr>
+        <p:txBody>
+          <a:bodyPr wrap="square">
+            <a:spAutoFit/>
+          </a:bodyPr>
+          <a:lstStyle/>
+          <a:p>
+            <a:pPr algn="ctr"/>
+            <a:r>
+              <a:rPr sz="4800" b="1" i="0">
+                <a:solidFill>
+                  <a:srgbClr val="FFFFFF"/>
+                </a:solidFill>
+                <a:latin typeface="Arial"/>
+              </a:rPr>
+              <a:t>Obrigado</a:t>
+            </a:r>
+          </a:p>
+        </p:txBody>
+      </p:sp>
+      <p:sp>
+        <p:nvSpPr>
+          <p:cNvPr id="4" name="TextBox 3"/>
+          <p:cNvSpPr txBox="1"/>
+          <p:nvPr/>
+        </p:nvSpPr>
+        <p:spPr>
+          <a:xfrm>
+            <a:off x="640080" y="4128516"/>
+            <a:ext cx="10911535" cy="310896"/>
+          </a:xfrm>
+          <a:prstGeom prst="rect">
+            <a:avLst/>
+          </a:prstGeom>
+          <a:noFill/>
+        </p:spPr>
+        <p:txBody>
+          <a:bodyPr wrap="square">
+            <a:spAutoFit/>
+          </a:bodyPr>
+          <a:lstStyle/>
+          <a:p>
+            <a:pPr algn="ctr"/>
+            <a:r>
+              <a:rPr sz="2000" b="0" i="0">
+                <a:solidFill>
+                  <a:srgbClr val="828282"/>
+                </a:solidFill>
+                <a:latin typeface="Arial"/>
+              </a:rPr>
+              <a:t>イエス ありがとう</a:t>
             </a:r>
           </a:p>
         </p:txBody>
@@ -4385,23 +4781,23 @@
         </p:nvSpPr>
         <p:spPr>
           <a:xfrm>
-            <a:off x="594360" y="2258568"/>
-            <a:ext cx="11002975" cy="685800"/>
-          </a:xfrm>
-          <a:prstGeom prst="rect">
-            <a:avLst/>
-          </a:prstGeom>
-          <a:noFill/>
-        </p:spPr>
-        <p:txBody>
-          <a:bodyPr wrap="square">
-            <a:spAutoFit/>
-          </a:bodyPr>
-          <a:lstStyle/>
-          <a:p>
-            <a:pPr algn="ctr"/>
-            <a:r>
-              <a:rPr sz="3805" b="1" i="0">
+            <a:off x="640080" y="2052828"/>
+            <a:ext cx="10911535" cy="731520"/>
+          </a:xfrm>
+          <a:prstGeom prst="rect">
+            <a:avLst/>
+          </a:prstGeom>
+          <a:noFill/>
+        </p:spPr>
+        <p:txBody>
+          <a:bodyPr wrap="square">
+            <a:spAutoFit/>
+          </a:bodyPr>
+          <a:lstStyle/>
+          <a:p>
+            <a:pPr algn="ctr"/>
+            <a:r>
+              <a:rPr sz="4100" b="1" i="0">
                 <a:solidFill>
                   <a:srgbClr val="FFFFFF"/>
                 </a:solidFill>
@@ -4420,29 +4816,29 @@
         </p:nvSpPr>
         <p:spPr>
           <a:xfrm>
-            <a:off x="594360" y="2980944"/>
-            <a:ext cx="11002975" cy="347472"/>
-          </a:xfrm>
-          <a:prstGeom prst="rect">
-            <a:avLst/>
-          </a:prstGeom>
-          <a:noFill/>
-        </p:spPr>
-        <p:txBody>
-          <a:bodyPr wrap="square">
-            <a:spAutoFit/>
-          </a:bodyPr>
-          <a:lstStyle/>
-          <a:p>
-            <a:pPr algn="ctr"/>
-            <a:r>
-              <a:rPr sz="2200" b="0" i="1">
-                <a:solidFill>
-                  <a:srgbClr val="8C8C8C"/>
-                </a:solidFill>
-                <a:latin typeface="Arial"/>
-              </a:rPr>
-              <a:t/>
+            <a:off x="640080" y="2985516"/>
+            <a:ext cx="10911535" cy="731520"/>
+          </a:xfrm>
+          <a:prstGeom prst="rect">
+            <a:avLst/>
+          </a:prstGeom>
+          <a:noFill/>
+        </p:spPr>
+        <p:txBody>
+          <a:bodyPr wrap="square">
+            <a:spAutoFit/>
+          </a:bodyPr>
+          <a:lstStyle/>
+          <a:p>
+            <a:pPr algn="ctr"/>
+            <a:r>
+              <a:rPr sz="4300" b="1" i="0">
+                <a:solidFill>
+                  <a:srgbClr val="FFFFFF"/>
+                </a:solidFill>
+                <a:latin typeface="Arial"/>
+              </a:rPr>
+              <a:t>E o fez por mim do amargo fel beber</a:t>
             </a:r>
           </a:p>
         </p:txBody>
@@ -4455,29 +4851,29 @@
         </p:nvSpPr>
         <p:spPr>
           <a:xfrm>
-            <a:off x="594360" y="3529584"/>
-            <a:ext cx="11002975" cy="685800"/>
-          </a:xfrm>
-          <a:prstGeom prst="rect">
-            <a:avLst/>
-          </a:prstGeom>
-          <a:noFill/>
-        </p:spPr>
-        <p:txBody>
-          <a:bodyPr wrap="square">
-            <a:spAutoFit/>
-          </a:bodyPr>
-          <a:lstStyle/>
-          <a:p>
-            <a:pPr algn="ctr"/>
-            <a:r>
-              <a:rPr sz="4022" b="1" i="0">
-                <a:solidFill>
-                  <a:srgbClr val="FFFFFF"/>
-                </a:solidFill>
-                <a:latin typeface="Arial"/>
-              </a:rPr>
-              <a:t>E o fez por mim do amargo fel beber</a:t>
+            <a:off x="640080" y="4128516"/>
+            <a:ext cx="10911535" cy="310896"/>
+          </a:xfrm>
+          <a:prstGeom prst="rect">
+            <a:avLst/>
+          </a:prstGeom>
+          <a:noFill/>
+        </p:spPr>
+        <p:txBody>
+          <a:bodyPr wrap="square">
+            <a:spAutoFit/>
+          </a:bodyPr>
+          <a:lstStyle/>
+          <a:p>
+            <a:pPr algn="ctr"/>
+            <a:r>
+              <a:rPr sz="2000" b="0" i="0">
+                <a:solidFill>
+                  <a:srgbClr val="828282"/>
+                </a:solidFill>
+                <a:latin typeface="Arial"/>
+              </a:rPr>
+              <a:t>私が受けるべき杯を</a:t>
             </a:r>
           </a:p>
         </p:txBody>
@@ -4490,29 +4886,29 @@
         </p:nvSpPr>
         <p:spPr>
           <a:xfrm>
-            <a:off x="594360" y="4251960"/>
-            <a:ext cx="11002975" cy="347472"/>
-          </a:xfrm>
-          <a:prstGeom prst="rect">
-            <a:avLst/>
-          </a:prstGeom>
-          <a:noFill/>
-        </p:spPr>
-        <p:txBody>
-          <a:bodyPr wrap="square">
-            <a:spAutoFit/>
-          </a:bodyPr>
-          <a:lstStyle/>
-          <a:p>
-            <a:pPr algn="ctr"/>
-            <a:r>
-              <a:rPr sz="2200" b="0" i="1">
-                <a:solidFill>
-                  <a:srgbClr val="8C8C8C"/>
-                </a:solidFill>
-                <a:latin typeface="Arial"/>
-              </a:rPr>
-              <a:t/>
+            <a:off x="640080" y="4494276"/>
+            <a:ext cx="10911535" cy="310896"/>
+          </a:xfrm>
+          <a:prstGeom prst="rect">
+            <a:avLst/>
+          </a:prstGeom>
+          <a:noFill/>
+        </p:spPr>
+        <p:txBody>
+          <a:bodyPr wrap="square">
+            <a:spAutoFit/>
+          </a:bodyPr>
+          <a:lstStyle/>
+          <a:p>
+            <a:pPr algn="ctr"/>
+            <a:r>
+              <a:rPr sz="2000" b="0" i="0">
+                <a:solidFill>
+                  <a:srgbClr val="828282"/>
+                </a:solidFill>
+                <a:latin typeface="Arial"/>
+              </a:rPr>
+              <a:t>御子が受け砕かれた</a:t>
             </a:r>
           </a:p>
         </p:txBody>
@@ -4551,23 +4947,23 @@
         </p:nvSpPr>
         <p:spPr>
           <a:xfrm>
-            <a:off x="594360" y="1837944"/>
-            <a:ext cx="11002975" cy="685800"/>
-          </a:xfrm>
-          <a:prstGeom prst="rect">
-            <a:avLst/>
-          </a:prstGeom>
-          <a:noFill/>
-        </p:spPr>
-        <p:txBody>
-          <a:bodyPr wrap="square">
-            <a:spAutoFit/>
-          </a:bodyPr>
-          <a:lstStyle/>
-          <a:p>
-            <a:pPr algn="ctr"/>
-            <a:r>
-              <a:rPr sz="4400" b="1" i="0">
+            <a:off x="640080" y="1650492"/>
+            <a:ext cx="10911535" cy="731520"/>
+          </a:xfrm>
+          <a:prstGeom prst="rect">
+            <a:avLst/>
+          </a:prstGeom>
+          <a:noFill/>
+        </p:spPr>
+        <p:txBody>
+          <a:bodyPr wrap="square">
+            <a:spAutoFit/>
+          </a:bodyPr>
+          <a:lstStyle/>
+          <a:p>
+            <a:pPr algn="ctr"/>
+            <a:r>
+              <a:rPr sz="4800" b="1" i="0">
                 <a:solidFill>
                   <a:srgbClr val="FFFFFF"/>
                 </a:solidFill>
@@ -4586,8 +4982,8 @@
         </p:nvSpPr>
         <p:spPr>
           <a:xfrm>
-            <a:off x="594360" y="2560320"/>
-            <a:ext cx="11002975" cy="384048"/>
+            <a:off x="640080" y="2418588"/>
+            <a:ext cx="10911535" cy="365760"/>
           </a:xfrm>
           <a:prstGeom prst="rect">
             <a:avLst/>
@@ -4604,7 +5000,7 @@
             <a:r>
               <a:rPr sz="2400" b="0" i="1">
                 <a:solidFill>
-                  <a:srgbClr val="B4B4B4"/>
+                  <a:srgbClr val="AAAAAA"/>
                 </a:solidFill>
                 <a:latin typeface="Arial"/>
               </a:rPr>
@@ -4621,8 +5017,78 @@
         </p:nvSpPr>
         <p:spPr>
           <a:xfrm>
-            <a:off x="594360" y="2980944"/>
-            <a:ext cx="11002975" cy="347472"/>
+            <a:off x="640080" y="2985516"/>
+            <a:ext cx="10911535" cy="731520"/>
+          </a:xfrm>
+          <a:prstGeom prst="rect">
+            <a:avLst/>
+          </a:prstGeom>
+          <a:noFill/>
+        </p:spPr>
+        <p:txBody>
+          <a:bodyPr wrap="square">
+            <a:spAutoFit/>
+          </a:bodyPr>
+          <a:lstStyle/>
+          <a:p>
+            <a:pPr algn="ctr"/>
+            <a:r>
+              <a:rPr sz="4800" b="1" i="0">
+                <a:solidFill>
+                  <a:srgbClr val="FFFFFF"/>
+                </a:solidFill>
+                <a:latin typeface="Arial"/>
+              </a:rPr>
+              <a:t>理解超える奥義</a:t>
+            </a:r>
+          </a:p>
+        </p:txBody>
+      </p:sp>
+      <p:sp>
+        <p:nvSpPr>
+          <p:cNvPr id="5" name="TextBox 4"/>
+          <p:cNvSpPr txBox="1"/>
+          <p:nvPr/>
+        </p:nvSpPr>
+        <p:spPr>
+          <a:xfrm>
+            <a:off x="640080" y="3753612"/>
+            <a:ext cx="10911535" cy="365760"/>
+          </a:xfrm>
+          <a:prstGeom prst="rect">
+            <a:avLst/>
+          </a:prstGeom>
+          <a:noFill/>
+        </p:spPr>
+        <p:txBody>
+          <a:bodyPr wrap="square">
+            <a:spAutoFit/>
+          </a:bodyPr>
+          <a:lstStyle/>
+          <a:p>
+            <a:pPr algn="ctr"/>
+            <a:r>
+              <a:rPr sz="2400" b="0" i="1">
+                <a:solidFill>
+                  <a:srgbClr val="AAAAAA"/>
+                </a:solidFill>
+                <a:latin typeface="Arial"/>
+              </a:rPr>
+              <a:t>rikai koeru okugi</a:t>
+            </a:r>
+          </a:p>
+        </p:txBody>
+      </p:sp>
+      <p:sp>
+        <p:nvSpPr>
+          <p:cNvPr id="6" name="TextBox 5"/>
+          <p:cNvSpPr txBox="1"/>
+          <p:nvPr/>
+        </p:nvSpPr>
+        <p:spPr>
+          <a:xfrm>
+            <a:off x="640080" y="4530852"/>
+            <a:ext cx="10911535" cy="310896"/>
           </a:xfrm>
           <a:prstGeom prst="rect">
             <a:avLst/>
@@ -4639,81 +5105,11 @@
             <a:r>
               <a:rPr sz="2000" b="0" i="1">
                 <a:solidFill>
-                  <a:srgbClr val="8C8C8C"/>
-                </a:solidFill>
-                <a:latin typeface="Arial"/>
-              </a:rPr>
-              <a:t/>
-            </a:r>
-          </a:p>
-        </p:txBody>
-      </p:sp>
-      <p:sp>
-        <p:nvSpPr>
-          <p:cNvPr id="5" name="TextBox 4"/>
-          <p:cNvSpPr txBox="1"/>
-          <p:nvPr/>
-        </p:nvSpPr>
-        <p:spPr>
-          <a:xfrm>
-            <a:off x="594360" y="3529584"/>
-            <a:ext cx="11002975" cy="685800"/>
-          </a:xfrm>
-          <a:prstGeom prst="rect">
-            <a:avLst/>
-          </a:prstGeom>
-          <a:noFill/>
-        </p:spPr>
-        <p:txBody>
-          <a:bodyPr wrap="square">
-            <a:spAutoFit/>
-          </a:bodyPr>
-          <a:lstStyle/>
-          <a:p>
-            <a:pPr algn="ctr"/>
-            <a:r>
-              <a:rPr sz="4400" b="1" i="0">
-                <a:solidFill>
-                  <a:srgbClr val="FFFFFF"/>
-                </a:solidFill>
-                <a:latin typeface="Arial"/>
-              </a:rPr>
-              <a:t>理解超える奥義</a:t>
-            </a:r>
-          </a:p>
-        </p:txBody>
-      </p:sp>
-      <p:sp>
-        <p:nvSpPr>
-          <p:cNvPr id="6" name="TextBox 5"/>
-          <p:cNvSpPr txBox="1"/>
-          <p:nvPr/>
-        </p:nvSpPr>
-        <p:spPr>
-          <a:xfrm>
-            <a:off x="594360" y="4251960"/>
-            <a:ext cx="11002975" cy="384048"/>
-          </a:xfrm>
-          <a:prstGeom prst="rect">
-            <a:avLst/>
-          </a:prstGeom>
-          <a:noFill/>
-        </p:spPr>
-        <p:txBody>
-          <a:bodyPr wrap="square">
-            <a:spAutoFit/>
-          </a:bodyPr>
-          <a:lstStyle/>
-          <a:p>
-            <a:pPr algn="ctr"/>
-            <a:r>
-              <a:rPr sz="2400" b="0" i="1">
-                <a:solidFill>
-                  <a:srgbClr val="B4B4B4"/>
-                </a:solidFill>
-                <a:latin typeface="Arial"/>
-              </a:rPr>
-              <a:t>rikai koeru okugi</a:t>
+                  <a:srgbClr val="828282"/>
+                </a:solidFill>
+                <a:latin typeface="Arial"/>
+              </a:rPr>
+              <a:t>A cruz e seu mistério não posso entender</a:t>
             </a:r>
           </a:p>
         </p:txBody>
@@ -4726,8 +5122,8 @@
         </p:nvSpPr>
         <p:spPr>
           <a:xfrm>
-            <a:off x="594360" y="4672584"/>
-            <a:ext cx="11002975" cy="347472"/>
+            <a:off x="640080" y="4896612"/>
+            <a:ext cx="10911535" cy="310896"/>
           </a:xfrm>
           <a:prstGeom prst="rect">
             <a:avLst/>
@@ -4744,11 +5140,11 @@
             <a:r>
               <a:rPr sz="2000" b="0" i="1">
                 <a:solidFill>
-                  <a:srgbClr val="8C8C8C"/>
-                </a:solidFill>
-                <a:latin typeface="Arial"/>
-              </a:rPr>
-              <a:t/>
+                  <a:srgbClr val="828282"/>
+                </a:solidFill>
+                <a:latin typeface="Arial"/>
+              </a:rPr>
+              <a:t>No Calvário agonizou</a:t>
             </a:r>
           </a:p>
         </p:txBody>
@@ -4787,23 +5183,23 @@
         </p:nvSpPr>
         <p:spPr>
           <a:xfrm>
-            <a:off x="594360" y="1837944"/>
-            <a:ext cx="11002975" cy="685800"/>
-          </a:xfrm>
-          <a:prstGeom prst="rect">
-            <a:avLst/>
-          </a:prstGeom>
-          <a:noFill/>
-        </p:spPr>
-        <p:txBody>
-          <a:bodyPr wrap="square">
-            <a:spAutoFit/>
-          </a:bodyPr>
-          <a:lstStyle/>
-          <a:p>
-            <a:pPr algn="ctr"/>
-            <a:r>
-              <a:rPr sz="4400" b="1" i="0">
+            <a:off x="640080" y="1650492"/>
+            <a:ext cx="10911535" cy="731520"/>
+          </a:xfrm>
+          <a:prstGeom prst="rect">
+            <a:avLst/>
+          </a:prstGeom>
+          <a:noFill/>
+        </p:spPr>
+        <p:txBody>
+          <a:bodyPr wrap="square">
+            <a:spAutoFit/>
+          </a:bodyPr>
+          <a:lstStyle/>
+          <a:p>
+            <a:pPr algn="ctr"/>
+            <a:r>
+              <a:rPr sz="4800" b="1" i="0">
                 <a:solidFill>
                   <a:srgbClr val="FFFFFF"/>
                 </a:solidFill>
@@ -4822,8 +5218,8 @@
         </p:nvSpPr>
         <p:spPr>
           <a:xfrm>
-            <a:off x="594360" y="2560320"/>
-            <a:ext cx="11002975" cy="384048"/>
+            <a:off x="640080" y="2418588"/>
+            <a:ext cx="10911535" cy="365760"/>
           </a:xfrm>
           <a:prstGeom prst="rect">
             <a:avLst/>
@@ -4840,7 +5236,7 @@
             <a:r>
               <a:rPr sz="2400" b="0" i="1">
                 <a:solidFill>
-                  <a:srgbClr val="B4B4B4"/>
+                  <a:srgbClr val="AAAAAA"/>
                 </a:solidFill>
                 <a:latin typeface="Arial"/>
               </a:rPr>
@@ -4857,8 +5253,78 @@
         </p:nvSpPr>
         <p:spPr>
           <a:xfrm>
-            <a:off x="594360" y="2980944"/>
-            <a:ext cx="11002975" cy="347472"/>
+            <a:off x="640080" y="2985516"/>
+            <a:ext cx="10911535" cy="731520"/>
+          </a:xfrm>
+          <a:prstGeom prst="rect">
+            <a:avLst/>
+          </a:prstGeom>
+          <a:noFill/>
+        </p:spPr>
+        <p:txBody>
+          <a:bodyPr wrap="square">
+            <a:spAutoFit/>
+          </a:bodyPr>
+          <a:lstStyle/>
+          <a:p>
+            <a:pPr algn="ctr"/>
+            <a:r>
+              <a:rPr sz="4800" b="1" i="0">
+                <a:solidFill>
+                  <a:srgbClr val="FFFFFF"/>
+                </a:solidFill>
+                <a:latin typeface="Arial"/>
+              </a:rPr>
+              <a:t>御子が受け砕かれた</a:t>
+            </a:r>
+          </a:p>
+        </p:txBody>
+      </p:sp>
+      <p:sp>
+        <p:nvSpPr>
+          <p:cNvPr id="5" name="TextBox 4"/>
+          <p:cNvSpPr txBox="1"/>
+          <p:nvPr/>
+        </p:nvSpPr>
+        <p:spPr>
+          <a:xfrm>
+            <a:off x="640080" y="3753612"/>
+            <a:ext cx="10911535" cy="365760"/>
+          </a:xfrm>
+          <a:prstGeom prst="rect">
+            <a:avLst/>
+          </a:prstGeom>
+          <a:noFill/>
+        </p:spPr>
+        <p:txBody>
+          <a:bodyPr wrap="square">
+            <a:spAutoFit/>
+          </a:bodyPr>
+          <a:lstStyle/>
+          <a:p>
+            <a:pPr algn="ctr"/>
+            <a:r>
+              <a:rPr sz="2400" b="0" i="1">
+                <a:solidFill>
+                  <a:srgbClr val="AAAAAA"/>
+                </a:solidFill>
+                <a:latin typeface="Arial"/>
+              </a:rPr>
+              <a:t>miko ga uke kudakareta</a:t>
+            </a:r>
+          </a:p>
+        </p:txBody>
+      </p:sp>
+      <p:sp>
+        <p:nvSpPr>
+          <p:cNvPr id="6" name="TextBox 5"/>
+          <p:cNvSpPr txBox="1"/>
+          <p:nvPr/>
+        </p:nvSpPr>
+        <p:spPr>
+          <a:xfrm>
+            <a:off x="640080" y="4530852"/>
+            <a:ext cx="10911535" cy="310896"/>
           </a:xfrm>
           <a:prstGeom prst="rect">
             <a:avLst/>
@@ -4875,81 +5341,11 @@
             <a:r>
               <a:rPr sz="2000" b="0" i="1">
                 <a:solidFill>
-                  <a:srgbClr val="8C8C8C"/>
-                </a:solidFill>
-                <a:latin typeface="Arial"/>
-              </a:rPr>
-              <a:t/>
-            </a:r>
-          </a:p>
-        </p:txBody>
-      </p:sp>
-      <p:sp>
-        <p:nvSpPr>
-          <p:cNvPr id="5" name="TextBox 4"/>
-          <p:cNvSpPr txBox="1"/>
-          <p:nvPr/>
-        </p:nvSpPr>
-        <p:spPr>
-          <a:xfrm>
-            <a:off x="594360" y="3529584"/>
-            <a:ext cx="11002975" cy="685800"/>
-          </a:xfrm>
-          <a:prstGeom prst="rect">
-            <a:avLst/>
-          </a:prstGeom>
-          <a:noFill/>
-        </p:spPr>
-        <p:txBody>
-          <a:bodyPr wrap="square">
-            <a:spAutoFit/>
-          </a:bodyPr>
-          <a:lstStyle/>
-          <a:p>
-            <a:pPr algn="ctr"/>
-            <a:r>
-              <a:rPr sz="4400" b="1" i="0">
-                <a:solidFill>
-                  <a:srgbClr val="FFFFFF"/>
-                </a:solidFill>
-                <a:latin typeface="Arial"/>
-              </a:rPr>
-              <a:t>御子が受け砕かれた</a:t>
-            </a:r>
-          </a:p>
-        </p:txBody>
-      </p:sp>
-      <p:sp>
-        <p:nvSpPr>
-          <p:cNvPr id="6" name="TextBox 5"/>
-          <p:cNvSpPr txBox="1"/>
-          <p:nvPr/>
-        </p:nvSpPr>
-        <p:spPr>
-          <a:xfrm>
-            <a:off x="594360" y="4251960"/>
-            <a:ext cx="11002975" cy="384048"/>
-          </a:xfrm>
-          <a:prstGeom prst="rect">
-            <a:avLst/>
-          </a:prstGeom>
-          <a:noFill/>
-        </p:spPr>
-        <p:txBody>
-          <a:bodyPr wrap="square">
-            <a:spAutoFit/>
-          </a:bodyPr>
-          <a:lstStyle/>
-          <a:p>
-            <a:pPr algn="ctr"/>
-            <a:r>
-              <a:rPr sz="2400" b="0" i="1">
-                <a:solidFill>
-                  <a:srgbClr val="B4B4B4"/>
-                </a:solidFill>
-                <a:latin typeface="Arial"/>
-              </a:rPr>
-              <a:t>miko ga uke kudakareta</a:t>
+                  <a:srgbClr val="828282"/>
+                </a:solidFill>
+                <a:latin typeface="Arial"/>
+              </a:rPr>
+              <a:t>O Deus santo e justo ao Filho esmagou</a:t>
             </a:r>
           </a:p>
         </p:txBody>
@@ -4962,8 +5358,8 @@
         </p:nvSpPr>
         <p:spPr>
           <a:xfrm>
-            <a:off x="594360" y="4672584"/>
-            <a:ext cx="11002975" cy="347472"/>
+            <a:off x="640080" y="4896612"/>
+            <a:ext cx="10911535" cy="310896"/>
           </a:xfrm>
           <a:prstGeom prst="rect">
             <a:avLst/>
@@ -4980,11 +5376,11 @@
             <a:r>
               <a:rPr sz="2000" b="0" i="1">
                 <a:solidFill>
-                  <a:srgbClr val="8C8C8C"/>
-                </a:solidFill>
-                <a:latin typeface="Arial"/>
-              </a:rPr>
-              <a:t/>
+                  <a:srgbClr val="828282"/>
+                </a:solidFill>
+                <a:latin typeface="Arial"/>
+              </a:rPr>
+              <a:t>E o fez por mim do amargo fel beber</a:t>
             </a:r>
           </a:p>
         </p:txBody>
@@ -5023,23 +5419,23 @@
         </p:nvSpPr>
         <p:spPr>
           <a:xfrm>
-            <a:off x="594360" y="2258568"/>
-            <a:ext cx="11002975" cy="685800"/>
-          </a:xfrm>
-          <a:prstGeom prst="rect">
-            <a:avLst/>
-          </a:prstGeom>
-          <a:noFill/>
-        </p:spPr>
-        <p:txBody>
-          <a:bodyPr wrap="square">
-            <a:spAutoFit/>
-          </a:bodyPr>
-          <a:lstStyle/>
-          <a:p>
-            <a:pPr algn="ctr"/>
-            <a:r>
-              <a:rPr sz="4400" b="1" i="0">
+            <a:off x="640080" y="2052828"/>
+            <a:ext cx="10911535" cy="731520"/>
+          </a:xfrm>
+          <a:prstGeom prst="rect">
+            <a:avLst/>
+          </a:prstGeom>
+          <a:noFill/>
+        </p:spPr>
+        <p:txBody>
+          <a:bodyPr wrap="square">
+            <a:spAutoFit/>
+          </a:bodyPr>
+          <a:lstStyle/>
+          <a:p>
+            <a:pPr algn="ctr"/>
+            <a:r>
+              <a:rPr sz="4800" b="1" i="0">
                 <a:solidFill>
                   <a:srgbClr val="FFFFFF"/>
                 </a:solidFill>
@@ -5058,29 +5454,29 @@
         </p:nvSpPr>
         <p:spPr>
           <a:xfrm>
-            <a:off x="594360" y="2980944"/>
-            <a:ext cx="11002975" cy="347472"/>
-          </a:xfrm>
-          <a:prstGeom prst="rect">
-            <a:avLst/>
-          </a:prstGeom>
-          <a:noFill/>
-        </p:spPr>
-        <p:txBody>
-          <a:bodyPr wrap="square">
-            <a:spAutoFit/>
-          </a:bodyPr>
-          <a:lstStyle/>
-          <a:p>
-            <a:pPr algn="ctr"/>
-            <a:r>
-              <a:rPr sz="2200" b="0" i="1">
-                <a:solidFill>
-                  <a:srgbClr val="8C8C8C"/>
-                </a:solidFill>
-                <a:latin typeface="Arial"/>
-              </a:rPr>
-              <a:t/>
+            <a:off x="640080" y="2985516"/>
+            <a:ext cx="10911535" cy="731520"/>
+          </a:xfrm>
+          <a:prstGeom prst="rect">
+            <a:avLst/>
+          </a:prstGeom>
+          <a:noFill/>
+        </p:spPr>
+        <p:txBody>
+          <a:bodyPr wrap="square">
+            <a:spAutoFit/>
+          </a:bodyPr>
+          <a:lstStyle/>
+          <a:p>
+            <a:pPr algn="ctr"/>
+            <a:r>
+              <a:rPr sz="4800" b="1" i="0">
+                <a:solidFill>
+                  <a:srgbClr val="FFFFFF"/>
+                </a:solidFill>
+                <a:latin typeface="Arial"/>
+              </a:rPr>
+              <a:t>Obrigado</a:t>
             </a:r>
           </a:p>
         </p:txBody>
@@ -5093,29 +5489,29 @@
         </p:nvSpPr>
         <p:spPr>
           <a:xfrm>
-            <a:off x="594360" y="3529584"/>
-            <a:ext cx="11002975" cy="685800"/>
-          </a:xfrm>
-          <a:prstGeom prst="rect">
-            <a:avLst/>
-          </a:prstGeom>
-          <a:noFill/>
-        </p:spPr>
-        <p:txBody>
-          <a:bodyPr wrap="square">
-            <a:spAutoFit/>
-          </a:bodyPr>
-          <a:lstStyle/>
-          <a:p>
-            <a:pPr algn="ctr"/>
-            <a:r>
-              <a:rPr sz="4400" b="1" i="0">
-                <a:solidFill>
-                  <a:srgbClr val="FFFFFF"/>
-                </a:solidFill>
-                <a:latin typeface="Arial"/>
-              </a:rPr>
-              <a:t>Obrigado</a:t>
+            <a:off x="640080" y="4128516"/>
+            <a:ext cx="10911535" cy="310896"/>
+          </a:xfrm>
+          <a:prstGeom prst="rect">
+            <a:avLst/>
+          </a:prstGeom>
+          <a:noFill/>
+        </p:spPr>
+        <p:txBody>
+          <a:bodyPr wrap="square">
+            <a:spAutoFit/>
+          </a:bodyPr>
+          <a:lstStyle/>
+          <a:p>
+            <a:pPr algn="ctr"/>
+            <a:r>
+              <a:rPr sz="2000" b="0" i="0">
+                <a:solidFill>
+                  <a:srgbClr val="828282"/>
+                </a:solidFill>
+                <a:latin typeface="Arial"/>
+              </a:rPr>
+              <a:t>罪 洗い流した</a:t>
             </a:r>
           </a:p>
         </p:txBody>
@@ -5128,29 +5524,29 @@
         </p:nvSpPr>
         <p:spPr>
           <a:xfrm>
-            <a:off x="594360" y="4251960"/>
-            <a:ext cx="11002975" cy="347472"/>
-          </a:xfrm>
-          <a:prstGeom prst="rect">
-            <a:avLst/>
-          </a:prstGeom>
-          <a:noFill/>
-        </p:spPr>
-        <p:txBody>
-          <a:bodyPr wrap="square">
-            <a:spAutoFit/>
-          </a:bodyPr>
-          <a:lstStyle/>
-          <a:p>
-            <a:pPr algn="ctr"/>
-            <a:r>
-              <a:rPr sz="2200" b="0" i="1">
-                <a:solidFill>
-                  <a:srgbClr val="8C8C8C"/>
-                </a:solidFill>
-                <a:latin typeface="Arial"/>
-              </a:rPr>
-              <a:t/>
+            <a:off x="640080" y="4494276"/>
+            <a:ext cx="10911535" cy="310896"/>
+          </a:xfrm>
+          <a:prstGeom prst="rect">
+            <a:avLst/>
+          </a:prstGeom>
+          <a:noFill/>
+        </p:spPr>
+        <p:txBody>
+          <a:bodyPr wrap="square">
+            <a:spAutoFit/>
+          </a:bodyPr>
+          <a:lstStyle/>
+          <a:p>
+            <a:pPr algn="ctr"/>
+            <a:r>
+              <a:rPr sz="2000" b="0" i="0">
+                <a:solidFill>
+                  <a:srgbClr val="828282"/>
+                </a:solidFill>
+                <a:latin typeface="Arial"/>
+              </a:rPr>
+              <a:t>イエスの血</a:t>
             </a:r>
           </a:p>
         </p:txBody>
@@ -5189,23 +5585,23 @@
         </p:nvSpPr>
         <p:spPr>
           <a:xfrm>
-            <a:off x="594360" y="2258568"/>
-            <a:ext cx="11002975" cy="685800"/>
-          </a:xfrm>
-          <a:prstGeom prst="rect">
-            <a:avLst/>
-          </a:prstGeom>
-          <a:noFill/>
-        </p:spPr>
-        <p:txBody>
-          <a:bodyPr wrap="square">
-            <a:spAutoFit/>
-          </a:bodyPr>
-          <a:lstStyle/>
-          <a:p>
-            <a:pPr algn="ctr"/>
-            <a:r>
-              <a:rPr sz="4400" b="1" i="0">
+            <a:off x="640080" y="2052828"/>
+            <a:ext cx="10911535" cy="731520"/>
+          </a:xfrm>
+          <a:prstGeom prst="rect">
+            <a:avLst/>
+          </a:prstGeom>
+          <a:noFill/>
+        </p:spPr>
+        <p:txBody>
+          <a:bodyPr wrap="square">
+            <a:spAutoFit/>
+          </a:bodyPr>
+          <a:lstStyle/>
+          <a:p>
+            <a:pPr algn="ctr"/>
+            <a:r>
+              <a:rPr sz="4800" b="1" i="0">
                 <a:solidFill>
                   <a:srgbClr val="FFFFFF"/>
                 </a:solidFill>
@@ -5224,29 +5620,29 @@
         </p:nvSpPr>
         <p:spPr>
           <a:xfrm>
-            <a:off x="594360" y="2980944"/>
-            <a:ext cx="11002975" cy="347472"/>
-          </a:xfrm>
-          <a:prstGeom prst="rect">
-            <a:avLst/>
-          </a:prstGeom>
-          <a:noFill/>
-        </p:spPr>
-        <p:txBody>
-          <a:bodyPr wrap="square">
-            <a:spAutoFit/>
-          </a:bodyPr>
-          <a:lstStyle/>
-          <a:p>
-            <a:pPr algn="ctr"/>
-            <a:r>
-              <a:rPr sz="2200" b="0" i="1">
-                <a:solidFill>
-                  <a:srgbClr val="8C8C8C"/>
-                </a:solidFill>
-                <a:latin typeface="Arial"/>
-              </a:rPr>
-              <a:t/>
+            <a:off x="640080" y="2985516"/>
+            <a:ext cx="10911535" cy="731520"/>
+          </a:xfrm>
+          <a:prstGeom prst="rect">
+            <a:avLst/>
+          </a:prstGeom>
+          <a:noFill/>
+        </p:spPr>
+        <p:txBody>
+          <a:bodyPr wrap="square">
+            <a:spAutoFit/>
+          </a:bodyPr>
+          <a:lstStyle/>
+          <a:p>
+            <a:pPr algn="ctr"/>
+            <a:r>
+              <a:rPr sz="4800" b="1" i="0">
+                <a:solidFill>
+                  <a:srgbClr val="FFFFFF"/>
+                </a:solidFill>
+                <a:latin typeface="Arial"/>
+              </a:rPr>
+              <a:t>Obrigado</a:t>
             </a:r>
           </a:p>
         </p:txBody>
@@ -5259,29 +5655,29 @@
         </p:nvSpPr>
         <p:spPr>
           <a:xfrm>
-            <a:off x="594360" y="3529584"/>
-            <a:ext cx="11002975" cy="685800"/>
-          </a:xfrm>
-          <a:prstGeom prst="rect">
-            <a:avLst/>
-          </a:prstGeom>
-          <a:noFill/>
-        </p:spPr>
-        <p:txBody>
-          <a:bodyPr wrap="square">
-            <a:spAutoFit/>
-          </a:bodyPr>
-          <a:lstStyle/>
-          <a:p>
-            <a:pPr algn="ctr"/>
-            <a:r>
-              <a:rPr sz="4400" b="1" i="0">
-                <a:solidFill>
-                  <a:srgbClr val="FFFFFF"/>
-                </a:solidFill>
-                <a:latin typeface="Arial"/>
-              </a:rPr>
-              <a:t>Obrigado</a:t>
+            <a:off x="640080" y="4128516"/>
+            <a:ext cx="10911535" cy="310896"/>
+          </a:xfrm>
+          <a:prstGeom prst="rect">
+            <a:avLst/>
+          </a:prstGeom>
+          <a:noFill/>
+        </p:spPr>
+        <p:txBody>
+          <a:bodyPr wrap="square">
+            <a:spAutoFit/>
+          </a:bodyPr>
+          <a:lstStyle/>
+          <a:p>
+            <a:pPr algn="ctr"/>
+            <a:r>
+              <a:rPr sz="2000" b="0" i="0">
+                <a:solidFill>
+                  <a:srgbClr val="828282"/>
+                </a:solidFill>
+                <a:latin typeface="Arial"/>
+              </a:rPr>
+              <a:t>御父のいかりなだめた 十字架</a:t>
             </a:r>
           </a:p>
         </p:txBody>
@@ -5294,29 +5690,29 @@
         </p:nvSpPr>
         <p:spPr>
           <a:xfrm>
-            <a:off x="594360" y="4251960"/>
-            <a:ext cx="11002975" cy="347472"/>
-          </a:xfrm>
-          <a:prstGeom prst="rect">
-            <a:avLst/>
-          </a:prstGeom>
-          <a:noFill/>
-        </p:spPr>
-        <p:txBody>
-          <a:bodyPr wrap="square">
-            <a:spAutoFit/>
-          </a:bodyPr>
-          <a:lstStyle/>
-          <a:p>
-            <a:pPr algn="ctr"/>
-            <a:r>
-              <a:rPr sz="2200" b="0" i="1">
-                <a:solidFill>
-                  <a:srgbClr val="8C8C8C"/>
-                </a:solidFill>
-                <a:latin typeface="Arial"/>
-              </a:rPr>
-              <a:t/>
+            <a:off x="640080" y="4494276"/>
+            <a:ext cx="10911535" cy="310896"/>
+          </a:xfrm>
+          <a:prstGeom prst="rect">
+            <a:avLst/>
+          </a:prstGeom>
+          <a:noFill/>
+        </p:spPr>
+        <p:txBody>
+          <a:bodyPr wrap="square">
+            <a:spAutoFit/>
+          </a:bodyPr>
+          <a:lstStyle/>
+          <a:p>
+            <a:pPr algn="ctr"/>
+            <a:r>
+              <a:rPr sz="2000" b="0" i="0">
+                <a:solidFill>
+                  <a:srgbClr val="828282"/>
+                </a:solidFill>
+                <a:latin typeface="Arial"/>
+              </a:rPr>
+              <a:t>かつての敵は 食卓を共に</a:t>
             </a:r>
           </a:p>
         </p:txBody>
@@ -5355,23 +5751,23 @@
         </p:nvSpPr>
         <p:spPr>
           <a:xfrm>
-            <a:off x="594360" y="2258568"/>
-            <a:ext cx="11002975" cy="685800"/>
-          </a:xfrm>
-          <a:prstGeom prst="rect">
-            <a:avLst/>
-          </a:prstGeom>
-          <a:noFill/>
-        </p:spPr>
-        <p:txBody>
-          <a:bodyPr wrap="square">
-            <a:spAutoFit/>
-          </a:bodyPr>
-          <a:lstStyle/>
-          <a:p>
-            <a:pPr algn="ctr"/>
-            <a:r>
-              <a:rPr sz="4400" b="1" i="0">
+            <a:off x="640080" y="2052828"/>
+            <a:ext cx="10911535" cy="731520"/>
+          </a:xfrm>
+          <a:prstGeom prst="rect">
+            <a:avLst/>
+          </a:prstGeom>
+          <a:noFill/>
+        </p:spPr>
+        <p:txBody>
+          <a:bodyPr wrap="square">
+            <a:spAutoFit/>
+          </a:bodyPr>
+          <a:lstStyle/>
+          <a:p>
+            <a:pPr algn="ctr"/>
+            <a:r>
+              <a:rPr sz="4800" b="1" i="0">
                 <a:solidFill>
                   <a:srgbClr val="FFFFFF"/>
                 </a:solidFill>
@@ -5390,29 +5786,29 @@
         </p:nvSpPr>
         <p:spPr>
           <a:xfrm>
-            <a:off x="594360" y="2980944"/>
-            <a:ext cx="11002975" cy="347472"/>
-          </a:xfrm>
-          <a:prstGeom prst="rect">
-            <a:avLst/>
-          </a:prstGeom>
-          <a:noFill/>
-        </p:spPr>
-        <p:txBody>
-          <a:bodyPr wrap="square">
-            <a:spAutoFit/>
-          </a:bodyPr>
-          <a:lstStyle/>
-          <a:p>
-            <a:pPr algn="ctr"/>
-            <a:r>
-              <a:rPr sz="2200" b="0" i="1">
-                <a:solidFill>
-                  <a:srgbClr val="8C8C8C"/>
-                </a:solidFill>
-                <a:latin typeface="Arial"/>
-              </a:rPr>
-              <a:t/>
+            <a:off x="640080" y="2985516"/>
+            <a:ext cx="10911535" cy="731520"/>
+          </a:xfrm>
+          <a:prstGeom prst="rect">
+            <a:avLst/>
+          </a:prstGeom>
+          <a:noFill/>
+        </p:spPr>
+        <p:txBody>
+          <a:bodyPr wrap="square">
+            <a:spAutoFit/>
+          </a:bodyPr>
+          <a:lstStyle/>
+          <a:p>
+            <a:pPr algn="ctr"/>
+            <a:r>
+              <a:rPr sz="4800" b="1" i="0">
+                <a:solidFill>
+                  <a:srgbClr val="FFFFFF"/>
+                </a:solidFill>
+                <a:latin typeface="Arial"/>
+              </a:rPr>
+              <a:t>Obrigado</a:t>
             </a:r>
           </a:p>
         </p:txBody>
@@ -5425,64 +5821,29 @@
         </p:nvSpPr>
         <p:spPr>
           <a:xfrm>
-            <a:off x="594360" y="3529584"/>
-            <a:ext cx="11002975" cy="685800"/>
-          </a:xfrm>
-          <a:prstGeom prst="rect">
-            <a:avLst/>
-          </a:prstGeom>
-          <a:noFill/>
-        </p:spPr>
-        <p:txBody>
-          <a:bodyPr wrap="square">
-            <a:spAutoFit/>
-          </a:bodyPr>
-          <a:lstStyle/>
-          <a:p>
-            <a:pPr algn="ctr"/>
-            <a:r>
-              <a:rPr sz="4400" b="1" i="0">
-                <a:solidFill>
-                  <a:srgbClr val="FFFFFF"/>
-                </a:solidFill>
-                <a:latin typeface="Arial"/>
-              </a:rPr>
-              <a:t>Obrigado</a:t>
-            </a:r>
-          </a:p>
-        </p:txBody>
-      </p:sp>
-      <p:sp>
-        <p:nvSpPr>
-          <p:cNvPr id="5" name="TextBox 4"/>
-          <p:cNvSpPr txBox="1"/>
-          <p:nvPr/>
-        </p:nvSpPr>
-        <p:spPr>
-          <a:xfrm>
-            <a:off x="594360" y="4251960"/>
-            <a:ext cx="11002975" cy="347472"/>
-          </a:xfrm>
-          <a:prstGeom prst="rect">
-            <a:avLst/>
-          </a:prstGeom>
-          <a:noFill/>
-        </p:spPr>
-        <p:txBody>
-          <a:bodyPr wrap="square">
-            <a:spAutoFit/>
-          </a:bodyPr>
-          <a:lstStyle/>
-          <a:p>
-            <a:pPr algn="ctr"/>
-            <a:r>
-              <a:rPr sz="2200" b="0" i="1">
-                <a:solidFill>
-                  <a:srgbClr val="8C8C8C"/>
-                </a:solidFill>
-                <a:latin typeface="Arial"/>
-              </a:rPr>
-              <a:t/>
+            <a:off x="640080" y="4128516"/>
+            <a:ext cx="10911535" cy="310896"/>
+          </a:xfrm>
+          <a:prstGeom prst="rect">
+            <a:avLst/>
+          </a:prstGeom>
+          <a:noFill/>
+        </p:spPr>
+        <p:txBody>
+          <a:bodyPr wrap="square">
+            <a:spAutoFit/>
+          </a:bodyPr>
+          <a:lstStyle/>
+          <a:p>
+            <a:pPr algn="ctr"/>
+            <a:r>
+              <a:rPr sz="2000" b="0" i="0">
+                <a:solidFill>
+                  <a:srgbClr val="828282"/>
+                </a:solidFill>
+                <a:latin typeface="Arial"/>
+              </a:rPr>
+              <a:t>イエス ありがとう</a:t>
             </a:r>
           </a:p>
         </p:txBody>
@@ -5521,23 +5882,23 @@
         </p:nvSpPr>
         <p:spPr>
           <a:xfrm>
-            <a:off x="594360" y="1837944"/>
-            <a:ext cx="11002975" cy="685800"/>
-          </a:xfrm>
-          <a:prstGeom prst="rect">
-            <a:avLst/>
-          </a:prstGeom>
-          <a:noFill/>
-        </p:spPr>
-        <p:txBody>
-          <a:bodyPr wrap="square">
-            <a:spAutoFit/>
-          </a:bodyPr>
-          <a:lstStyle/>
-          <a:p>
-            <a:pPr algn="ctr"/>
-            <a:r>
-              <a:rPr sz="4400" b="1" i="0">
+            <a:off x="640080" y="1650492"/>
+            <a:ext cx="10911535" cy="731520"/>
+          </a:xfrm>
+          <a:prstGeom prst="rect">
+            <a:avLst/>
+          </a:prstGeom>
+          <a:noFill/>
+        </p:spPr>
+        <p:txBody>
+          <a:bodyPr wrap="square">
+            <a:spAutoFit/>
+          </a:bodyPr>
+          <a:lstStyle/>
+          <a:p>
+            <a:pPr algn="ctr"/>
+            <a:r>
+              <a:rPr sz="4800" b="1" i="0">
                 <a:solidFill>
                   <a:srgbClr val="FFFFFF"/>
                 </a:solidFill>
@@ -5556,8 +5917,8 @@
         </p:nvSpPr>
         <p:spPr>
           <a:xfrm>
-            <a:off x="594360" y="2560320"/>
-            <a:ext cx="11002975" cy="384048"/>
+            <a:off x="640080" y="2418588"/>
+            <a:ext cx="10911535" cy="365760"/>
           </a:xfrm>
           <a:prstGeom prst="rect">
             <a:avLst/>
@@ -5574,7 +5935,7 @@
             <a:r>
               <a:rPr sz="2400" b="0" i="1">
                 <a:solidFill>
-                  <a:srgbClr val="B4B4B4"/>
+                  <a:srgbClr val="AAAAAA"/>
                 </a:solidFill>
                 <a:latin typeface="Arial"/>
               </a:rPr>
@@ -5591,8 +5952,78 @@
         </p:nvSpPr>
         <p:spPr>
           <a:xfrm>
-            <a:off x="594360" y="2980944"/>
-            <a:ext cx="11002975" cy="347472"/>
+            <a:off x="640080" y="2985516"/>
+            <a:ext cx="10911535" cy="731520"/>
+          </a:xfrm>
+          <a:prstGeom prst="rect">
+            <a:avLst/>
+          </a:prstGeom>
+          <a:noFill/>
+        </p:spPr>
+        <p:txBody>
+          <a:bodyPr wrap="square">
+            <a:spAutoFit/>
+          </a:bodyPr>
+          <a:lstStyle/>
+          <a:p>
+            <a:pPr algn="ctr"/>
+            <a:r>
+              <a:rPr sz="4800" b="1" i="0">
+                <a:solidFill>
+                  <a:srgbClr val="FFFFFF"/>
+                </a:solidFill>
+                <a:latin typeface="Arial"/>
+              </a:rPr>
+              <a:t>イエスの血</a:t>
+            </a:r>
+          </a:p>
+        </p:txBody>
+      </p:sp>
+      <p:sp>
+        <p:nvSpPr>
+          <p:cNvPr id="5" name="TextBox 4"/>
+          <p:cNvSpPr txBox="1"/>
+          <p:nvPr/>
+        </p:nvSpPr>
+        <p:spPr>
+          <a:xfrm>
+            <a:off x="640080" y="3753612"/>
+            <a:ext cx="10911535" cy="365760"/>
+          </a:xfrm>
+          <a:prstGeom prst="rect">
+            <a:avLst/>
+          </a:prstGeom>
+          <a:noFill/>
+        </p:spPr>
+        <p:txBody>
+          <a:bodyPr wrap="square">
+            <a:spAutoFit/>
+          </a:bodyPr>
+          <a:lstStyle/>
+          <a:p>
+            <a:pPr algn="ctr"/>
+            <a:r>
+              <a:rPr sz="2400" b="0" i="1">
+                <a:solidFill>
+                  <a:srgbClr val="AAAAAA"/>
+                </a:solidFill>
+                <a:latin typeface="Arial"/>
+              </a:rPr>
+              <a:t>iesu no chi</a:t>
+            </a:r>
+          </a:p>
+        </p:txBody>
+      </p:sp>
+      <p:sp>
+        <p:nvSpPr>
+          <p:cNvPr id="6" name="TextBox 5"/>
+          <p:cNvSpPr txBox="1"/>
+          <p:nvPr/>
+        </p:nvSpPr>
+        <p:spPr>
+          <a:xfrm>
+            <a:off x="640080" y="4530852"/>
+            <a:ext cx="10911535" cy="310896"/>
           </a:xfrm>
           <a:prstGeom prst="rect">
             <a:avLst/>
@@ -5609,81 +6040,11 @@
             <a:r>
               <a:rPr sz="2000" b="0" i="1">
                 <a:solidFill>
-                  <a:srgbClr val="8C8C8C"/>
-                </a:solidFill>
-                <a:latin typeface="Arial"/>
-              </a:rPr>
-              <a:t/>
-            </a:r>
-          </a:p>
-        </p:txBody>
-      </p:sp>
-      <p:sp>
-        <p:nvSpPr>
-          <p:cNvPr id="5" name="TextBox 4"/>
-          <p:cNvSpPr txBox="1"/>
-          <p:nvPr/>
-        </p:nvSpPr>
-        <p:spPr>
-          <a:xfrm>
-            <a:off x="594360" y="3529584"/>
-            <a:ext cx="11002975" cy="685800"/>
-          </a:xfrm>
-          <a:prstGeom prst="rect">
-            <a:avLst/>
-          </a:prstGeom>
-          <a:noFill/>
-        </p:spPr>
-        <p:txBody>
-          <a:bodyPr wrap="square">
-            <a:spAutoFit/>
-          </a:bodyPr>
-          <a:lstStyle/>
-          <a:p>
-            <a:pPr algn="ctr"/>
-            <a:r>
-              <a:rPr sz="4400" b="1" i="0">
-                <a:solidFill>
-                  <a:srgbClr val="FFFFFF"/>
-                </a:solidFill>
-                <a:latin typeface="Arial"/>
-              </a:rPr>
-              <a:t>イエスの血</a:t>
-            </a:r>
-          </a:p>
-        </p:txBody>
-      </p:sp>
-      <p:sp>
-        <p:nvSpPr>
-          <p:cNvPr id="6" name="TextBox 5"/>
-          <p:cNvSpPr txBox="1"/>
-          <p:nvPr/>
-        </p:nvSpPr>
-        <p:spPr>
-          <a:xfrm>
-            <a:off x="594360" y="4251960"/>
-            <a:ext cx="11002975" cy="384048"/>
-          </a:xfrm>
-          <a:prstGeom prst="rect">
-            <a:avLst/>
-          </a:prstGeom>
-          <a:noFill/>
-        </p:spPr>
-        <p:txBody>
-          <a:bodyPr wrap="square">
-            <a:spAutoFit/>
-          </a:bodyPr>
-          <a:lstStyle/>
-          <a:p>
-            <a:pPr algn="ctr"/>
-            <a:r>
-              <a:rPr sz="2400" b="0" i="1">
-                <a:solidFill>
-                  <a:srgbClr val="B4B4B4"/>
-                </a:solidFill>
-                <a:latin typeface="Arial"/>
-              </a:rPr>
-              <a:t>iesu no chi</a:t>
+                  <a:srgbClr val="828282"/>
+                </a:solidFill>
+                <a:latin typeface="Arial"/>
+              </a:rPr>
+              <a:t>Jesus, teu sangue me lavou</a:t>
             </a:r>
           </a:p>
         </p:txBody>
@@ -5696,8 +6057,8 @@
         </p:nvSpPr>
         <p:spPr>
           <a:xfrm>
-            <a:off x="594360" y="4672584"/>
-            <a:ext cx="11002975" cy="347472"/>
+            <a:off x="640080" y="4896612"/>
+            <a:ext cx="10911535" cy="310896"/>
           </a:xfrm>
           <a:prstGeom prst="rect">
             <a:avLst/>
@@ -5714,11 +6075,11 @@
             <a:r>
               <a:rPr sz="2000" b="0" i="1">
                 <a:solidFill>
-                  <a:srgbClr val="8C8C8C"/>
-                </a:solidFill>
-                <a:latin typeface="Arial"/>
-              </a:rPr>
-              <a:t/>
+                  <a:srgbClr val="828282"/>
+                </a:solidFill>
+                <a:latin typeface="Arial"/>
+              </a:rPr>
+              <a:t>Obrigado</a:t>
             </a:r>
           </a:p>
         </p:txBody>
@@ -5757,23 +6118,23 @@
         </p:nvSpPr>
         <p:spPr>
           <a:xfrm>
-            <a:off x="594360" y="1837944"/>
-            <a:ext cx="11002975" cy="685800"/>
-          </a:xfrm>
-          <a:prstGeom prst="rect">
-            <a:avLst/>
-          </a:prstGeom>
-          <a:noFill/>
-        </p:spPr>
-        <p:txBody>
-          <a:bodyPr wrap="square">
-            <a:spAutoFit/>
-          </a:bodyPr>
-          <a:lstStyle/>
-          <a:p>
-            <a:pPr algn="ctr"/>
-            <a:r>
-              <a:rPr sz="4400" b="1" i="0">
+            <a:off x="640080" y="1650492"/>
+            <a:ext cx="10911535" cy="731520"/>
+          </a:xfrm>
+          <a:prstGeom prst="rect">
+            <a:avLst/>
+          </a:prstGeom>
+          <a:noFill/>
+        </p:spPr>
+        <p:txBody>
+          <a:bodyPr wrap="square">
+            <a:spAutoFit/>
+          </a:bodyPr>
+          <a:lstStyle/>
+          <a:p>
+            <a:pPr algn="ctr"/>
+            <a:r>
+              <a:rPr sz="4800" b="1" i="0">
                 <a:solidFill>
                   <a:srgbClr val="FFFFFF"/>
                 </a:solidFill>
@@ -5792,8 +6153,8 @@
         </p:nvSpPr>
         <p:spPr>
           <a:xfrm>
-            <a:off x="594360" y="2560320"/>
-            <a:ext cx="11002975" cy="384048"/>
+            <a:off x="640080" y="2418588"/>
+            <a:ext cx="10911535" cy="365760"/>
           </a:xfrm>
           <a:prstGeom prst="rect">
             <a:avLst/>
@@ -5810,7 +6171,7 @@
             <a:r>
               <a:rPr sz="2400" b="0" i="1">
                 <a:solidFill>
-                  <a:srgbClr val="B4B4B4"/>
+                  <a:srgbClr val="AAAAAA"/>
                 </a:solidFill>
                 <a:latin typeface="Arial"/>
               </a:rPr>
@@ -5827,8 +6188,78 @@
         </p:nvSpPr>
         <p:spPr>
           <a:xfrm>
-            <a:off x="594360" y="2980944"/>
-            <a:ext cx="11002975" cy="347472"/>
+            <a:off x="640080" y="2985516"/>
+            <a:ext cx="10911535" cy="731520"/>
+          </a:xfrm>
+          <a:prstGeom prst="rect">
+            <a:avLst/>
+          </a:prstGeom>
+          <a:noFill/>
+        </p:spPr>
+        <p:txBody>
+          <a:bodyPr wrap="square">
+            <a:spAutoFit/>
+          </a:bodyPr>
+          <a:lstStyle/>
+          <a:p>
+            <a:pPr algn="ctr"/>
+            <a:r>
+              <a:rPr sz="4800" b="1" i="0">
+                <a:solidFill>
+                  <a:srgbClr val="FFFFFF"/>
+                </a:solidFill>
+                <a:latin typeface="Arial"/>
+              </a:rPr>
+              <a:t>かつての敵は 食卓を共に</a:t>
+            </a:r>
+          </a:p>
+        </p:txBody>
+      </p:sp>
+      <p:sp>
+        <p:nvSpPr>
+          <p:cNvPr id="5" name="TextBox 4"/>
+          <p:cNvSpPr txBox="1"/>
+          <p:nvPr/>
+        </p:nvSpPr>
+        <p:spPr>
+          <a:xfrm>
+            <a:off x="640080" y="3753612"/>
+            <a:ext cx="10911535" cy="365760"/>
+          </a:xfrm>
+          <a:prstGeom prst="rect">
+            <a:avLst/>
+          </a:prstGeom>
+          <a:noFill/>
+        </p:spPr>
+        <p:txBody>
+          <a:bodyPr wrap="square">
+            <a:spAutoFit/>
+          </a:bodyPr>
+          <a:lstStyle/>
+          <a:p>
+            <a:pPr algn="ctr"/>
+            <a:r>
+              <a:rPr sz="2400" b="0" i="1">
+                <a:solidFill>
+                  <a:srgbClr val="AAAAAA"/>
+                </a:solidFill>
+                <a:latin typeface="Arial"/>
+              </a:rPr>
+              <a:t>katsute no teki wa shokutaku wo tomoni</a:t>
+            </a:r>
+          </a:p>
+        </p:txBody>
+      </p:sp>
+      <p:sp>
+        <p:nvSpPr>
+          <p:cNvPr id="6" name="TextBox 5"/>
+          <p:cNvSpPr txBox="1"/>
+          <p:nvPr/>
+        </p:nvSpPr>
+        <p:spPr>
+          <a:xfrm>
+            <a:off x="640080" y="4530852"/>
+            <a:ext cx="10911535" cy="310896"/>
           </a:xfrm>
           <a:prstGeom prst="rect">
             <a:avLst/>
@@ -5845,81 +6276,11 @@
             <a:r>
               <a:rPr sz="2000" b="0" i="1">
                 <a:solidFill>
-                  <a:srgbClr val="8C8C8C"/>
-                </a:solidFill>
-                <a:latin typeface="Arial"/>
-              </a:rPr>
-              <a:t/>
-            </a:r>
-          </a:p>
-        </p:txBody>
-      </p:sp>
-      <p:sp>
-        <p:nvSpPr>
-          <p:cNvPr id="5" name="TextBox 4"/>
-          <p:cNvSpPr txBox="1"/>
-          <p:nvPr/>
-        </p:nvSpPr>
-        <p:spPr>
-          <a:xfrm>
-            <a:off x="594360" y="3529584"/>
-            <a:ext cx="11002975" cy="685800"/>
-          </a:xfrm>
-          <a:prstGeom prst="rect">
-            <a:avLst/>
-          </a:prstGeom>
-          <a:noFill/>
-        </p:spPr>
-        <p:txBody>
-          <a:bodyPr wrap="square">
-            <a:spAutoFit/>
-          </a:bodyPr>
-          <a:lstStyle/>
-          <a:p>
-            <a:pPr algn="ctr"/>
-            <a:r>
-              <a:rPr sz="4400" b="1" i="0">
-                <a:solidFill>
-                  <a:srgbClr val="FFFFFF"/>
-                </a:solidFill>
-                <a:latin typeface="Arial"/>
-              </a:rPr>
-              <a:t>かつての敵は 食卓を共に</a:t>
-            </a:r>
-          </a:p>
-        </p:txBody>
-      </p:sp>
-      <p:sp>
-        <p:nvSpPr>
-          <p:cNvPr id="6" name="TextBox 5"/>
-          <p:cNvSpPr txBox="1"/>
-          <p:nvPr/>
-        </p:nvSpPr>
-        <p:spPr>
-          <a:xfrm>
-            <a:off x="594360" y="4251960"/>
-            <a:ext cx="11002975" cy="384048"/>
-          </a:xfrm>
-          <a:prstGeom prst="rect">
-            <a:avLst/>
-          </a:prstGeom>
-          <a:noFill/>
-        </p:spPr>
-        <p:txBody>
-          <a:bodyPr wrap="square">
-            <a:spAutoFit/>
-          </a:bodyPr>
-          <a:lstStyle/>
-          <a:p>
-            <a:pPr algn="ctr"/>
-            <a:r>
-              <a:rPr sz="2400" b="0" i="1">
-                <a:solidFill>
-                  <a:srgbClr val="B4B4B4"/>
-                </a:solidFill>
-                <a:latin typeface="Arial"/>
-              </a:rPr>
-              <a:t>katsute no teki wa shokutaku wo tomoni</a:t>
+                  <a:srgbClr val="828282"/>
+                </a:solidFill>
+                <a:latin typeface="Arial"/>
+              </a:rPr>
+              <a:t>De Deus a ira toda aplacou</a:t>
             </a:r>
           </a:p>
         </p:txBody>
@@ -5932,8 +6293,8 @@
         </p:nvSpPr>
         <p:spPr>
           <a:xfrm>
-            <a:off x="594360" y="4672584"/>
-            <a:ext cx="11002975" cy="347472"/>
+            <a:off x="640080" y="4896612"/>
+            <a:ext cx="10911535" cy="310896"/>
           </a:xfrm>
           <a:prstGeom prst="rect">
             <a:avLst/>
@@ -5950,11 +6311,11 @@
             <a:r>
               <a:rPr sz="2000" b="0" i="1">
                 <a:solidFill>
-                  <a:srgbClr val="8C8C8C"/>
-                </a:solidFill>
-                <a:latin typeface="Arial"/>
-              </a:rPr>
-              <a:t/>
+                  <a:srgbClr val="828282"/>
+                </a:solidFill>
+                <a:latin typeface="Arial"/>
+              </a:rPr>
+              <a:t>Obrigado</a:t>
             </a:r>
           </a:p>
         </p:txBody>

--- a/output_pptx/Jesus_Thank_You.pptx
+++ b/output_pptx/Jesus_Thank_You.pptx
@@ -4284,6 +4284,76 @@
           </a:p>
         </p:txBody>
       </p:sp>
+      <p:sp>
+        <p:nvSpPr>
+          <p:cNvPr id="4" name="TextBox 3"/>
+          <p:cNvSpPr txBox="1"/>
+          <p:nvPr/>
+        </p:nvSpPr>
+        <p:spPr>
+          <a:xfrm>
+            <a:off x="640080" y="4128516"/>
+            <a:ext cx="10911535" cy="310896"/>
+          </a:xfrm>
+          <a:prstGeom prst="rect">
+            <a:avLst/>
+          </a:prstGeom>
+          <a:noFill/>
+        </p:spPr>
+        <p:txBody>
+          <a:bodyPr wrap="square">
+            <a:spAutoFit/>
+          </a:bodyPr>
+          <a:lstStyle/>
+          <a:p>
+            <a:pPr algn="ctr"/>
+            <a:r>
+              <a:rPr sz="2000" b="0" i="0">
+                <a:solidFill>
+                  <a:srgbClr val="828282"/>
+                </a:solidFill>
+                <a:latin typeface="Arial"/>
+              </a:rPr>
+              <a:t>わが心の愛よ</a:t>
+            </a:r>
+          </a:p>
+        </p:txBody>
+      </p:sp>
+      <p:sp>
+        <p:nvSpPr>
+          <p:cNvPr id="5" name="TextBox 4"/>
+          <p:cNvSpPr txBox="1"/>
+          <p:nvPr/>
+        </p:nvSpPr>
+        <p:spPr>
+          <a:xfrm>
+            <a:off x="640080" y="4494276"/>
+            <a:ext cx="10911535" cy="310896"/>
+          </a:xfrm>
+          <a:prstGeom prst="rect">
+            <a:avLst/>
+          </a:prstGeom>
+          <a:noFill/>
+        </p:spPr>
+        <p:txBody>
+          <a:bodyPr wrap="square">
+            <a:spAutoFit/>
+          </a:bodyPr>
+          <a:lstStyle/>
+          <a:p>
+            <a:pPr algn="ctr"/>
+            <a:r>
+              <a:rPr sz="2000" b="0" i="0">
+                <a:solidFill>
+                  <a:srgbClr val="828282"/>
+                </a:solidFill>
+                <a:latin typeface="Arial"/>
+              </a:rPr>
+              <a:t>あなたのために生きたい</a:t>
+            </a:r>
+          </a:p>
+        </p:txBody>
+      </p:sp>
     </p:spTree>
   </p:cSld>
   <p:clrMapOvr>
@@ -4747,6 +4817,41 @@
           </a:p>
         </p:txBody>
       </p:sp>
+      <p:sp>
+        <p:nvSpPr>
+          <p:cNvPr id="5" name="TextBox 4"/>
+          <p:cNvSpPr txBox="1"/>
+          <p:nvPr/>
+        </p:nvSpPr>
+        <p:spPr>
+          <a:xfrm>
+            <a:off x="640080" y="4494276"/>
+            <a:ext cx="10911535" cy="310896"/>
+          </a:xfrm>
+          <a:prstGeom prst="rect">
+            <a:avLst/>
+          </a:prstGeom>
+          <a:noFill/>
+        </p:spPr>
+        <p:txBody>
+          <a:bodyPr wrap="square">
+            <a:spAutoFit/>
+          </a:bodyPr>
+          <a:lstStyle/>
+          <a:p>
+            <a:pPr algn="ctr"/>
+            <a:r>
+              <a:rPr sz="2000" b="0" i="0">
+                <a:solidFill>
+                  <a:srgbClr val="828282"/>
+                </a:solidFill>
+                <a:latin typeface="Arial"/>
+              </a:rPr>
+              <a:t>ありがとう</a:t>
+            </a:r>
+          </a:p>
+        </p:txBody>
+      </p:sp>
     </p:spTree>
   </p:cSld>
   <p:clrMapOvr>
@@ -5844,6 +5949,41 @@
                 <a:latin typeface="Arial"/>
               </a:rPr>
               <a:t>イエス ありがとう</a:t>
+            </a:r>
+          </a:p>
+        </p:txBody>
+      </p:sp>
+      <p:sp>
+        <p:nvSpPr>
+          <p:cNvPr id="5" name="TextBox 4"/>
+          <p:cNvSpPr txBox="1"/>
+          <p:nvPr/>
+        </p:nvSpPr>
+        <p:spPr>
+          <a:xfrm>
+            <a:off x="640080" y="4494276"/>
+            <a:ext cx="10911535" cy="310896"/>
+          </a:xfrm>
+          <a:prstGeom prst="rect">
+            <a:avLst/>
+          </a:prstGeom>
+          <a:noFill/>
+        </p:spPr>
+        <p:txBody>
+          <a:bodyPr wrap="square">
+            <a:spAutoFit/>
+          </a:bodyPr>
+          <a:lstStyle/>
+          <a:p>
+            <a:pPr algn="ctr"/>
+            <a:r>
+              <a:rPr sz="2000" b="0" i="0">
+                <a:solidFill>
+                  <a:srgbClr val="828282"/>
+                </a:solidFill>
+                <a:latin typeface="Arial"/>
+              </a:rPr>
+              <a:t>ありがとう</a:t>
             </a:r>
           </a:p>
         </p:txBody>
